--- a/public/data/集团战略发展规划演示文稿模板.pptx
+++ b/public/data/集团战略发展规划演示文稿模板.pptx
@@ -269,7 +269,7 @@
       </p:grpSpPr>
       <p:sp>
         <p:nvSpPr>
-          <p:cNvPr id="917111254" name="Header Placeholder 1"/>
+          <p:cNvPr id="1653851305" name="Header Placeholder 1"/>
           <p:cNvSpPr>
             <a:spLocks noGrp="1"/>
           </p:cNvSpPr>
@@ -303,7 +303,7 @@
       </p:sp>
       <p:sp>
         <p:nvSpPr>
-          <p:cNvPr id="269519928" name="Date Placeholder 2"/>
+          <p:cNvPr id="1470523746" name="Date Placeholder 2"/>
           <p:cNvSpPr>
             <a:spLocks noGrp="1"/>
           </p:cNvSpPr>
@@ -341,7 +341,7 @@
       </p:sp>
       <p:sp>
         <p:nvSpPr>
-          <p:cNvPr id="595927397" name="Slide Image Placeholder 3"/>
+          <p:cNvPr id="122206456" name="Slide Image Placeholder 3"/>
           <p:cNvSpPr>
             <a:spLocks noChangeAspect="1" noGrp="1" noRot="1"/>
           </p:cNvSpPr>
@@ -377,7 +377,7 @@
       </p:sp>
       <p:sp>
         <p:nvSpPr>
-          <p:cNvPr id="1683224052" name="Notes Placeholder 4"/>
+          <p:cNvPr id="546777765" name="Notes Placeholder 4"/>
           <p:cNvSpPr>
             <a:spLocks noGrp="1"/>
           </p:cNvSpPr>
@@ -451,7 +451,7 @@
       </p:sp>
       <p:sp>
         <p:nvSpPr>
-          <p:cNvPr id="1970461080" name="Footer Placeholder 5"/>
+          <p:cNvPr id="766959469" name="Footer Placeholder 5"/>
           <p:cNvSpPr>
             <a:spLocks noGrp="1"/>
           </p:cNvSpPr>
@@ -485,7 +485,7 @@
       </p:sp>
       <p:sp>
         <p:nvSpPr>
-          <p:cNvPr id="1853374841" name="Slide Number Placeholder 6"/>
+          <p:cNvPr id="2126535118" name="Slide Number Placeholder 6"/>
           <p:cNvSpPr>
             <a:spLocks noGrp="1"/>
           </p:cNvSpPr>
@@ -638,7 +638,7 @@
       </p:grpSpPr>
       <p:sp>
         <p:nvSpPr>
-          <p:cNvPr id="1616746240" name="Header Placeholder 1"/>
+          <p:cNvPr id="85077897" name="Header Placeholder 1"/>
           <p:cNvSpPr>
             <a:spLocks noGrp="1"/>
           </p:cNvSpPr>
@@ -672,7 +672,7 @@
       </p:sp>
       <p:sp>
         <p:nvSpPr>
-          <p:cNvPr id="1118577914" name="Date Placeholder 2"/>
+          <p:cNvPr id="60680150" name="Date Placeholder 2"/>
           <p:cNvSpPr>
             <a:spLocks noGrp="1"/>
           </p:cNvSpPr>
@@ -710,7 +710,7 @@
       </p:sp>
       <p:sp>
         <p:nvSpPr>
-          <p:cNvPr id="104296951" name="Slide Image Placeholder 3"/>
+          <p:cNvPr id="1334115084" name="Slide Image Placeholder 3"/>
           <p:cNvSpPr>
             <a:spLocks noChangeAspect="1" noGrp="1" noRot="1"/>
           </p:cNvSpPr>
@@ -746,7 +746,7 @@
       </p:sp>
       <p:sp>
         <p:nvSpPr>
-          <p:cNvPr id="873961423" name="Notes Placeholder 4"/>
+          <p:cNvPr id="154539720" name="Notes Placeholder 4"/>
           <p:cNvSpPr>
             <a:spLocks noGrp="1"/>
           </p:cNvSpPr>
@@ -791,7 +791,7 @@
       </p:sp>
       <p:sp>
         <p:nvSpPr>
-          <p:cNvPr id="9167612" name="Footer Placeholder 5"/>
+          <p:cNvPr id="559953335" name="Footer Placeholder 5"/>
           <p:cNvSpPr>
             <a:spLocks noGrp="1"/>
           </p:cNvSpPr>
@@ -825,7 +825,7 @@
       </p:sp>
       <p:sp>
         <p:nvSpPr>
-          <p:cNvPr id="1064029323" name="Slide Number Placeholder 6"/>
+          <p:cNvPr id="195107679" name="Slide Number Placeholder 6"/>
           <p:cNvSpPr>
             <a:spLocks noGrp="1"/>
           </p:cNvSpPr>
@@ -888,7 +888,7 @@
       </p:grpSpPr>
       <p:sp>
         <p:nvSpPr>
-          <p:cNvPr id="684121508" name="Header Placeholder 1"/>
+          <p:cNvPr id="13867532" name="Header Placeholder 1"/>
           <p:cNvSpPr>
             <a:spLocks noGrp="1"/>
           </p:cNvSpPr>
@@ -922,7 +922,7 @@
       </p:sp>
       <p:sp>
         <p:nvSpPr>
-          <p:cNvPr id="1224178757" name="Date Placeholder 2"/>
+          <p:cNvPr id="225856532" name="Date Placeholder 2"/>
           <p:cNvSpPr>
             <a:spLocks noGrp="1"/>
           </p:cNvSpPr>
@@ -960,7 +960,7 @@
       </p:sp>
       <p:sp>
         <p:nvSpPr>
-          <p:cNvPr id="548293076" name="Slide Image Placeholder 3"/>
+          <p:cNvPr id="294621589" name="Slide Image Placeholder 3"/>
           <p:cNvSpPr>
             <a:spLocks noChangeAspect="1" noGrp="1" noRot="1"/>
           </p:cNvSpPr>
@@ -996,7 +996,7 @@
       </p:sp>
       <p:sp>
         <p:nvSpPr>
-          <p:cNvPr id="786564673" name="Notes Placeholder 4"/>
+          <p:cNvPr id="1842158773" name="Notes Placeholder 4"/>
           <p:cNvSpPr>
             <a:spLocks noGrp="1"/>
           </p:cNvSpPr>
@@ -1041,7 +1041,7 @@
       </p:sp>
       <p:sp>
         <p:nvSpPr>
-          <p:cNvPr id="1154949263" name="Footer Placeholder 5"/>
+          <p:cNvPr id="1875468018" name="Footer Placeholder 5"/>
           <p:cNvSpPr>
             <a:spLocks noGrp="1"/>
           </p:cNvSpPr>
@@ -1075,7 +1075,7 @@
       </p:sp>
       <p:sp>
         <p:nvSpPr>
-          <p:cNvPr id="1474608339" name="Slide Number Placeholder 6"/>
+          <p:cNvPr id="333245934" name="Slide Number Placeholder 6"/>
           <p:cNvSpPr>
             <a:spLocks noGrp="1"/>
           </p:cNvSpPr>
@@ -1138,7 +1138,7 @@
       </p:grpSpPr>
       <p:sp>
         <p:nvSpPr>
-          <p:cNvPr id="1792311027" name="Header Placeholder 1"/>
+          <p:cNvPr id="1990394642" name="Header Placeholder 1"/>
           <p:cNvSpPr>
             <a:spLocks noGrp="1"/>
           </p:cNvSpPr>
@@ -1172,7 +1172,7 @@
       </p:sp>
       <p:sp>
         <p:nvSpPr>
-          <p:cNvPr id="304967186" name="Date Placeholder 2"/>
+          <p:cNvPr id="42558060" name="Date Placeholder 2"/>
           <p:cNvSpPr>
             <a:spLocks noGrp="1"/>
           </p:cNvSpPr>
@@ -1210,7 +1210,7 @@
       </p:sp>
       <p:sp>
         <p:nvSpPr>
-          <p:cNvPr id="948567000" name="Slide Image Placeholder 3"/>
+          <p:cNvPr id="690351431" name="Slide Image Placeholder 3"/>
           <p:cNvSpPr>
             <a:spLocks noChangeAspect="1" noGrp="1" noRot="1"/>
           </p:cNvSpPr>
@@ -1246,7 +1246,7 @@
       </p:sp>
       <p:sp>
         <p:nvSpPr>
-          <p:cNvPr id="1275790270" name="Notes Placeholder 4"/>
+          <p:cNvPr id="922475482" name="Notes Placeholder 4"/>
           <p:cNvSpPr>
             <a:spLocks noGrp="1"/>
           </p:cNvSpPr>
@@ -1291,7 +1291,7 @@
       </p:sp>
       <p:sp>
         <p:nvSpPr>
-          <p:cNvPr id="700926516" name="Footer Placeholder 5"/>
+          <p:cNvPr id="674890359" name="Footer Placeholder 5"/>
           <p:cNvSpPr>
             <a:spLocks noGrp="1"/>
           </p:cNvSpPr>
@@ -1325,7 +1325,7 @@
       </p:sp>
       <p:sp>
         <p:nvSpPr>
-          <p:cNvPr id="343742518" name="Slide Number Placeholder 6"/>
+          <p:cNvPr id="1161164582" name="Slide Number Placeholder 6"/>
           <p:cNvSpPr>
             <a:spLocks noGrp="1"/>
           </p:cNvSpPr>
@@ -1388,7 +1388,7 @@
       </p:grpSpPr>
       <p:sp>
         <p:nvSpPr>
-          <p:cNvPr id="978034943" name="Header Placeholder 1"/>
+          <p:cNvPr id="1130126297" name="Header Placeholder 1"/>
           <p:cNvSpPr>
             <a:spLocks noGrp="1"/>
           </p:cNvSpPr>
@@ -1422,7 +1422,7 @@
       </p:sp>
       <p:sp>
         <p:nvSpPr>
-          <p:cNvPr id="1164059156" name="Date Placeholder 2"/>
+          <p:cNvPr id="317039571" name="Date Placeholder 2"/>
           <p:cNvSpPr>
             <a:spLocks noGrp="1"/>
           </p:cNvSpPr>
@@ -1460,7 +1460,7 @@
       </p:sp>
       <p:sp>
         <p:nvSpPr>
-          <p:cNvPr id="974621641" name="Slide Image Placeholder 3"/>
+          <p:cNvPr id="1167466246" name="Slide Image Placeholder 3"/>
           <p:cNvSpPr>
             <a:spLocks noChangeAspect="1" noGrp="1" noRot="1"/>
           </p:cNvSpPr>
@@ -1496,7 +1496,7 @@
       </p:sp>
       <p:sp>
         <p:nvSpPr>
-          <p:cNvPr id="2064617576" name="Notes Placeholder 4"/>
+          <p:cNvPr id="2144507112" name="Notes Placeholder 4"/>
           <p:cNvSpPr>
             <a:spLocks noGrp="1"/>
           </p:cNvSpPr>
@@ -1541,7 +1541,7 @@
       </p:sp>
       <p:sp>
         <p:nvSpPr>
-          <p:cNvPr id="1695145974" name="Footer Placeholder 5"/>
+          <p:cNvPr id="1502618816" name="Footer Placeholder 5"/>
           <p:cNvSpPr>
             <a:spLocks noGrp="1"/>
           </p:cNvSpPr>
@@ -1575,7 +1575,7 @@
       </p:sp>
       <p:sp>
         <p:nvSpPr>
-          <p:cNvPr id="1973891282" name="Slide Number Placeholder 6"/>
+          <p:cNvPr id="695309069" name="Slide Number Placeholder 6"/>
           <p:cNvSpPr>
             <a:spLocks noGrp="1"/>
           </p:cNvSpPr>
@@ -1638,7 +1638,7 @@
       </p:grpSpPr>
       <p:sp>
         <p:nvSpPr>
-          <p:cNvPr id="1472289526" name="Header Placeholder 1"/>
+          <p:cNvPr id="1573844254" name="Header Placeholder 1"/>
           <p:cNvSpPr>
             <a:spLocks noGrp="1"/>
           </p:cNvSpPr>
@@ -1672,7 +1672,7 @@
       </p:sp>
       <p:sp>
         <p:nvSpPr>
-          <p:cNvPr id="1020240797" name="Date Placeholder 2"/>
+          <p:cNvPr id="1826010950" name="Date Placeholder 2"/>
           <p:cNvSpPr>
             <a:spLocks noGrp="1"/>
           </p:cNvSpPr>
@@ -1710,7 +1710,7 @@
       </p:sp>
       <p:sp>
         <p:nvSpPr>
-          <p:cNvPr id="1355930343" name="Slide Image Placeholder 3"/>
+          <p:cNvPr id="1696142782" name="Slide Image Placeholder 3"/>
           <p:cNvSpPr>
             <a:spLocks noChangeAspect="1" noGrp="1" noRot="1"/>
           </p:cNvSpPr>
@@ -1746,7 +1746,7 @@
       </p:sp>
       <p:sp>
         <p:nvSpPr>
-          <p:cNvPr id="403766883" name="Notes Placeholder 4"/>
+          <p:cNvPr id="17127421" name="Notes Placeholder 4"/>
           <p:cNvSpPr>
             <a:spLocks noGrp="1"/>
           </p:cNvSpPr>
@@ -1791,7 +1791,7 @@
       </p:sp>
       <p:sp>
         <p:nvSpPr>
-          <p:cNvPr id="25245118" name="Footer Placeholder 5"/>
+          <p:cNvPr id="1515117117" name="Footer Placeholder 5"/>
           <p:cNvSpPr>
             <a:spLocks noGrp="1"/>
           </p:cNvSpPr>
@@ -1825,7 +1825,7 @@
       </p:sp>
       <p:sp>
         <p:nvSpPr>
-          <p:cNvPr id="1938227646" name="Slide Number Placeholder 6"/>
+          <p:cNvPr id="1761458822" name="Slide Number Placeholder 6"/>
           <p:cNvSpPr>
             <a:spLocks noGrp="1"/>
           </p:cNvSpPr>
@@ -1888,7 +1888,7 @@
       </p:grpSpPr>
       <p:sp>
         <p:nvSpPr>
-          <p:cNvPr id="618495119" name="Header Placeholder 1"/>
+          <p:cNvPr id="1118445050" name="Header Placeholder 1"/>
           <p:cNvSpPr>
             <a:spLocks noGrp="1"/>
           </p:cNvSpPr>
@@ -1922,7 +1922,7 @@
       </p:sp>
       <p:sp>
         <p:nvSpPr>
-          <p:cNvPr id="1767031675" name="Date Placeholder 2"/>
+          <p:cNvPr id="1020001852" name="Date Placeholder 2"/>
           <p:cNvSpPr>
             <a:spLocks noGrp="1"/>
           </p:cNvSpPr>
@@ -1960,7 +1960,7 @@
       </p:sp>
       <p:sp>
         <p:nvSpPr>
-          <p:cNvPr id="706256778" name="Slide Image Placeholder 3"/>
+          <p:cNvPr id="260627670" name="Slide Image Placeholder 3"/>
           <p:cNvSpPr>
             <a:spLocks noChangeAspect="1" noGrp="1" noRot="1"/>
           </p:cNvSpPr>
@@ -1996,7 +1996,7 @@
       </p:sp>
       <p:sp>
         <p:nvSpPr>
-          <p:cNvPr id="1179482759" name="Notes Placeholder 4"/>
+          <p:cNvPr id="1051468206" name="Notes Placeholder 4"/>
           <p:cNvSpPr>
             <a:spLocks noGrp="1"/>
           </p:cNvSpPr>
@@ -2041,7 +2041,7 @@
       </p:sp>
       <p:sp>
         <p:nvSpPr>
-          <p:cNvPr id="1470083352" name="Footer Placeholder 5"/>
+          <p:cNvPr id="396456728" name="Footer Placeholder 5"/>
           <p:cNvSpPr>
             <a:spLocks noGrp="1"/>
           </p:cNvSpPr>
@@ -2075,7 +2075,7 @@
       </p:sp>
       <p:sp>
         <p:nvSpPr>
-          <p:cNvPr id="2034076299" name="Slide Number Placeholder 6"/>
+          <p:cNvPr id="1604457100" name="Slide Number Placeholder 6"/>
           <p:cNvSpPr>
             <a:spLocks noGrp="1"/>
           </p:cNvSpPr>
@@ -2138,7 +2138,7 @@
       </p:grpSpPr>
       <p:sp>
         <p:nvSpPr>
-          <p:cNvPr id="104003718" name="Header Placeholder 1"/>
+          <p:cNvPr id="1969070203" name="Header Placeholder 1"/>
           <p:cNvSpPr>
             <a:spLocks noGrp="1"/>
           </p:cNvSpPr>
@@ -2172,7 +2172,7 @@
       </p:sp>
       <p:sp>
         <p:nvSpPr>
-          <p:cNvPr id="1814726764" name="Date Placeholder 2"/>
+          <p:cNvPr id="2052011483" name="Date Placeholder 2"/>
           <p:cNvSpPr>
             <a:spLocks noGrp="1"/>
           </p:cNvSpPr>
@@ -2210,7 +2210,7 @@
       </p:sp>
       <p:sp>
         <p:nvSpPr>
-          <p:cNvPr id="1109096646" name="Slide Image Placeholder 3"/>
+          <p:cNvPr id="1970984919" name="Slide Image Placeholder 3"/>
           <p:cNvSpPr>
             <a:spLocks noChangeAspect="1" noGrp="1" noRot="1"/>
           </p:cNvSpPr>
@@ -2246,7 +2246,7 @@
       </p:sp>
       <p:sp>
         <p:nvSpPr>
-          <p:cNvPr id="2024333630" name="Notes Placeholder 4"/>
+          <p:cNvPr id="1600287441" name="Notes Placeholder 4"/>
           <p:cNvSpPr>
             <a:spLocks noGrp="1"/>
           </p:cNvSpPr>
@@ -2291,7 +2291,7 @@
       </p:sp>
       <p:sp>
         <p:nvSpPr>
-          <p:cNvPr id="36028373" name="Footer Placeholder 5"/>
+          <p:cNvPr id="1790831262" name="Footer Placeholder 5"/>
           <p:cNvSpPr>
             <a:spLocks noGrp="1"/>
           </p:cNvSpPr>
@@ -2325,7 +2325,7 @@
       </p:sp>
       <p:sp>
         <p:nvSpPr>
-          <p:cNvPr id="1320417434" name="Slide Number Placeholder 6"/>
+          <p:cNvPr id="871367889" name="Slide Number Placeholder 6"/>
           <p:cNvSpPr>
             <a:spLocks noGrp="1"/>
           </p:cNvSpPr>
@@ -2388,7 +2388,7 @@
       </p:grpSpPr>
       <p:sp>
         <p:nvSpPr>
-          <p:cNvPr id="1753469986" name="Header Placeholder 1"/>
+          <p:cNvPr id="555681632" name="Header Placeholder 1"/>
           <p:cNvSpPr>
             <a:spLocks noGrp="1"/>
           </p:cNvSpPr>
@@ -2422,7 +2422,7 @@
       </p:sp>
       <p:sp>
         <p:nvSpPr>
-          <p:cNvPr id="177693040" name="Date Placeholder 2"/>
+          <p:cNvPr id="537897657" name="Date Placeholder 2"/>
           <p:cNvSpPr>
             <a:spLocks noGrp="1"/>
           </p:cNvSpPr>
@@ -2460,7 +2460,7 @@
       </p:sp>
       <p:sp>
         <p:nvSpPr>
-          <p:cNvPr id="122282967" name="Slide Image Placeholder 3"/>
+          <p:cNvPr id="677395995" name="Slide Image Placeholder 3"/>
           <p:cNvSpPr>
             <a:spLocks noChangeAspect="1" noGrp="1" noRot="1"/>
           </p:cNvSpPr>
@@ -2496,7 +2496,7 @@
       </p:sp>
       <p:sp>
         <p:nvSpPr>
-          <p:cNvPr id="827747021" name="Notes Placeholder 4"/>
+          <p:cNvPr id="1108718632" name="Notes Placeholder 4"/>
           <p:cNvSpPr>
             <a:spLocks noGrp="1"/>
           </p:cNvSpPr>
@@ -2541,7 +2541,7 @@
       </p:sp>
       <p:sp>
         <p:nvSpPr>
-          <p:cNvPr id="2131415769" name="Footer Placeholder 5"/>
+          <p:cNvPr id="1719708187" name="Footer Placeholder 5"/>
           <p:cNvSpPr>
             <a:spLocks noGrp="1"/>
           </p:cNvSpPr>
@@ -2575,7 +2575,7 @@
       </p:sp>
       <p:sp>
         <p:nvSpPr>
-          <p:cNvPr id="977236632" name="Slide Number Placeholder 6"/>
+          <p:cNvPr id="704836917" name="Slide Number Placeholder 6"/>
           <p:cNvSpPr>
             <a:spLocks noGrp="1"/>
           </p:cNvSpPr>
@@ -2638,7 +2638,7 @@
       </p:grpSpPr>
       <p:sp>
         <p:nvSpPr>
-          <p:cNvPr id="1373263768" name="Header Placeholder 1"/>
+          <p:cNvPr id="2147422273" name="Header Placeholder 1"/>
           <p:cNvSpPr>
             <a:spLocks noGrp="1"/>
           </p:cNvSpPr>
@@ -2672,7 +2672,7 @@
       </p:sp>
       <p:sp>
         <p:nvSpPr>
-          <p:cNvPr id="1467085939" name="Date Placeholder 2"/>
+          <p:cNvPr id="1768552675" name="Date Placeholder 2"/>
           <p:cNvSpPr>
             <a:spLocks noGrp="1"/>
           </p:cNvSpPr>
@@ -2710,7 +2710,7 @@
       </p:sp>
       <p:sp>
         <p:nvSpPr>
-          <p:cNvPr id="318202085" name="Slide Image Placeholder 3"/>
+          <p:cNvPr id="333682306" name="Slide Image Placeholder 3"/>
           <p:cNvSpPr>
             <a:spLocks noChangeAspect="1" noGrp="1" noRot="1"/>
           </p:cNvSpPr>
@@ -2746,7 +2746,7 @@
       </p:sp>
       <p:sp>
         <p:nvSpPr>
-          <p:cNvPr id="259973331" name="Notes Placeholder 4"/>
+          <p:cNvPr id="1736514789" name="Notes Placeholder 4"/>
           <p:cNvSpPr>
             <a:spLocks noGrp="1"/>
           </p:cNvSpPr>
@@ -2791,7 +2791,7 @@
       </p:sp>
       <p:sp>
         <p:nvSpPr>
-          <p:cNvPr id="1770176428" name="Footer Placeholder 5"/>
+          <p:cNvPr id="1021175880" name="Footer Placeholder 5"/>
           <p:cNvSpPr>
             <a:spLocks noGrp="1"/>
           </p:cNvSpPr>
@@ -2825,7 +2825,7 @@
       </p:sp>
       <p:sp>
         <p:nvSpPr>
-          <p:cNvPr id="452773229" name="Slide Number Placeholder 6"/>
+          <p:cNvPr id="1490097831" name="Slide Number Placeholder 6"/>
           <p:cNvSpPr>
             <a:spLocks noGrp="1"/>
           </p:cNvSpPr>
@@ -2888,7 +2888,7 @@
       </p:grpSpPr>
       <p:sp>
         <p:nvSpPr>
-          <p:cNvPr id="1044849067" name="Header Placeholder 1"/>
+          <p:cNvPr id="2012497106" name="Header Placeholder 1"/>
           <p:cNvSpPr>
             <a:spLocks noGrp="1"/>
           </p:cNvSpPr>
@@ -2922,7 +2922,7 @@
       </p:sp>
       <p:sp>
         <p:nvSpPr>
-          <p:cNvPr id="764592610" name="Date Placeholder 2"/>
+          <p:cNvPr id="2013043065" name="Date Placeholder 2"/>
           <p:cNvSpPr>
             <a:spLocks noGrp="1"/>
           </p:cNvSpPr>
@@ -2960,7 +2960,7 @@
       </p:sp>
       <p:sp>
         <p:nvSpPr>
-          <p:cNvPr id="1560681722" name="Slide Image Placeholder 3"/>
+          <p:cNvPr id="1235325096" name="Slide Image Placeholder 3"/>
           <p:cNvSpPr>
             <a:spLocks noChangeAspect="1" noGrp="1" noRot="1"/>
           </p:cNvSpPr>
@@ -2996,7 +2996,7 @@
       </p:sp>
       <p:sp>
         <p:nvSpPr>
-          <p:cNvPr id="521847129" name="Notes Placeholder 4"/>
+          <p:cNvPr id="73744278" name="Notes Placeholder 4"/>
           <p:cNvSpPr>
             <a:spLocks noGrp="1"/>
           </p:cNvSpPr>
@@ -3041,7 +3041,7 @@
       </p:sp>
       <p:sp>
         <p:nvSpPr>
-          <p:cNvPr id="966572318" name="Footer Placeholder 5"/>
+          <p:cNvPr id="457822349" name="Footer Placeholder 5"/>
           <p:cNvSpPr>
             <a:spLocks noGrp="1"/>
           </p:cNvSpPr>
@@ -3075,7 +3075,7 @@
       </p:sp>
       <p:sp>
         <p:nvSpPr>
-          <p:cNvPr id="722406270" name="Slide Number Placeholder 6"/>
+          <p:cNvPr id="1046714293" name="Slide Number Placeholder 6"/>
           <p:cNvSpPr>
             <a:spLocks noGrp="1"/>
           </p:cNvSpPr>
@@ -3138,7 +3138,7 @@
       </p:grpSpPr>
       <p:sp>
         <p:nvSpPr>
-          <p:cNvPr id="411987546" name="Shape 30"/>
+          <p:cNvPr id="176092275" name="Shape 30"/>
           <p:cNvSpPr txBox="1"/>
           <p:nvPr>
             <p:ph type="ctrTitle"/>
@@ -3279,7 +3279,7 @@
       </p:sp>
       <p:sp>
         <p:nvSpPr>
-          <p:cNvPr id="2131132004" name="Shape 31"/>
+          <p:cNvPr id="1468820100" name="Shape 31"/>
           <p:cNvSpPr txBox="1"/>
           <p:nvPr>
             <p:ph type="subTitle" idx="1"/>
@@ -3467,7 +3467,7 @@
       </p:sp>
       <p:sp>
         <p:nvSpPr>
-          <p:cNvPr id="420649016" name="Shape 32"/>
+          <p:cNvPr id="364048996" name="Shape 32"/>
           <p:cNvSpPr txBox="1"/>
           <p:nvPr>
             <p:ph type="dt" idx="10"/>
@@ -3601,7 +3601,7 @@
       </p:sp>
       <p:sp>
         <p:nvSpPr>
-          <p:cNvPr id="423411255" name="Shape 33"/>
+          <p:cNvPr id="1973205274" name="Shape 33"/>
           <p:cNvSpPr txBox="1"/>
           <p:nvPr>
             <p:ph type="ftr" idx="11"/>
@@ -3735,7 +3735,7 @@
       </p:sp>
       <p:sp>
         <p:nvSpPr>
-          <p:cNvPr id="98431849" name="Shape 34"/>
+          <p:cNvPr id="1293907795" name="Shape 34"/>
           <p:cNvSpPr txBox="1"/>
           <p:nvPr>
             <p:ph type="sldNum" idx="12"/>
@@ -3869,7 +3869,7 @@
       </p:grpSpPr>
       <p:sp>
         <p:nvSpPr>
-          <p:cNvPr id="1279908111" name="Shape 49"/>
+          <p:cNvPr id="2130015561" name="Shape 49"/>
           <p:cNvSpPr txBox="1"/>
           <p:nvPr>
             <p:ph type="title"/>
@@ -4009,7 +4009,7 @@
       </p:sp>
       <p:sp>
         <p:nvSpPr>
-          <p:cNvPr id="264946915" name="Shape 50"/>
+          <p:cNvPr id="2146808486" name="Shape 50"/>
           <p:cNvSpPr txBox="1"/>
           <p:nvPr>
             <p:ph type="body" idx="1"/>
@@ -4197,7 +4197,7 @@
       </p:sp>
       <p:sp>
         <p:nvSpPr>
-          <p:cNvPr id="2145733399" name="Shape 51"/>
+          <p:cNvPr id="827494578" name="Shape 51"/>
           <p:cNvSpPr txBox="1"/>
           <p:nvPr>
             <p:ph type="dt" idx="10"/>
@@ -4331,7 +4331,7 @@
       </p:sp>
       <p:sp>
         <p:nvSpPr>
-          <p:cNvPr id="182960198" name="Shape 52"/>
+          <p:cNvPr id="1646353566" name="Shape 52"/>
           <p:cNvSpPr txBox="1"/>
           <p:nvPr>
             <p:ph type="ftr" idx="11"/>
@@ -4465,7 +4465,7 @@
       </p:sp>
       <p:sp>
         <p:nvSpPr>
-          <p:cNvPr id="331049028" name="Shape 53"/>
+          <p:cNvPr id="529396503" name="Shape 53"/>
           <p:cNvSpPr txBox="1"/>
           <p:nvPr>
             <p:ph type="sldNum" idx="12"/>
@@ -4599,7 +4599,7 @@
       </p:grpSpPr>
       <p:sp>
         <p:nvSpPr>
-          <p:cNvPr id="1426348467" name="Shape 15"/>
+          <p:cNvPr id="163753071" name="Shape 15"/>
           <p:cNvSpPr txBox="1"/>
           <p:nvPr>
             <p:ph type="title"/>
@@ -4739,7 +4739,7 @@
       </p:sp>
       <p:sp>
         <p:nvSpPr>
-          <p:cNvPr id="1021962522" name="Shape 16"/>
+          <p:cNvPr id="1261978012" name="Shape 16"/>
           <p:cNvSpPr txBox="1"/>
           <p:nvPr>
             <p:ph type="body" idx="1"/>
@@ -4927,7 +4927,7 @@
       </p:sp>
       <p:sp>
         <p:nvSpPr>
-          <p:cNvPr id="795656496" name="Shape 17"/>
+          <p:cNvPr id="1525823542" name="Shape 17"/>
           <p:cNvSpPr txBox="1"/>
           <p:nvPr>
             <p:ph type="dt" idx="10"/>
@@ -5061,7 +5061,7 @@
       </p:sp>
       <p:sp>
         <p:nvSpPr>
-          <p:cNvPr id="1069860712" name="Shape 18"/>
+          <p:cNvPr id="1953102051" name="Shape 18"/>
           <p:cNvSpPr txBox="1"/>
           <p:nvPr>
             <p:ph type="ftr" idx="11"/>
@@ -5195,7 +5195,7 @@
       </p:sp>
       <p:sp>
         <p:nvSpPr>
-          <p:cNvPr id="127133072" name="Shape 19"/>
+          <p:cNvPr id="1498940686" name="Shape 19"/>
           <p:cNvSpPr txBox="1"/>
           <p:nvPr>
             <p:ph type="sldNum" idx="12"/>
@@ -5354,7 +5354,7 @@
       </p:grpSpPr>
       <p:sp>
         <p:nvSpPr>
-          <p:cNvPr id="34277669" name="Shape 54"/>
+          <p:cNvPr id="390603217" name="Shape 54"/>
           <p:cNvSpPr txBox="1"/>
           <p:nvPr>
             <p:ph type="title"/>
@@ -5494,7 +5494,7 @@
       </p:sp>
       <p:sp>
         <p:nvSpPr>
-          <p:cNvPr id="887907322" name="Shape 55"/>
+          <p:cNvPr id="1445559585" name="Shape 55"/>
           <p:cNvSpPr txBox="1"/>
           <p:nvPr>
             <p:ph type="body" idx="1"/>
@@ -5682,7 +5682,7 @@
       </p:sp>
       <p:sp>
         <p:nvSpPr>
-          <p:cNvPr id="1767964257" name="Shape 56"/>
+          <p:cNvPr id="883951301" name="Shape 56"/>
           <p:cNvSpPr txBox="1"/>
           <p:nvPr>
             <p:ph type="dt" idx="10"/>
@@ -5816,7 +5816,7 @@
       </p:sp>
       <p:sp>
         <p:nvSpPr>
-          <p:cNvPr id="1435227341" name="Shape 57"/>
+          <p:cNvPr id="1688039222" name="Shape 57"/>
           <p:cNvSpPr txBox="1"/>
           <p:nvPr>
             <p:ph type="ftr" idx="11"/>
@@ -5950,7 +5950,7 @@
       </p:sp>
       <p:sp>
         <p:nvSpPr>
-          <p:cNvPr id="1600752659" name="Shape 58"/>
+          <p:cNvPr id="730243571" name="Shape 58"/>
           <p:cNvSpPr txBox="1"/>
           <p:nvPr>
             <p:ph type="sldNum" idx="12"/>
@@ -6084,7 +6084,7 @@
       </p:grpSpPr>
       <p:sp>
         <p:nvSpPr>
-          <p:cNvPr id="892163761" name="Shape 59"/>
+          <p:cNvPr id="1401454317" name="Shape 59"/>
           <p:cNvSpPr txBox="1"/>
           <p:nvPr>
             <p:ph type="title"/>
@@ -6225,7 +6225,7 @@
       </p:sp>
       <p:sp>
         <p:nvSpPr>
-          <p:cNvPr id="1211884790" name="Shape 60"/>
+          <p:cNvPr id="432667421" name="Shape 60"/>
           <p:cNvSpPr txBox="1"/>
           <p:nvPr>
             <p:ph type="body" idx="1"/>
@@ -6449,7 +6449,7 @@
       </p:sp>
       <p:sp>
         <p:nvSpPr>
-          <p:cNvPr id="279906591" name="Shape 61"/>
+          <p:cNvPr id="1082334708" name="Shape 61"/>
           <p:cNvSpPr txBox="1"/>
           <p:nvPr>
             <p:ph type="dt" idx="10"/>
@@ -6583,7 +6583,7 @@
       </p:sp>
       <p:sp>
         <p:nvSpPr>
-          <p:cNvPr id="48962283" name="Shape 62"/>
+          <p:cNvPr id="1506411862" name="Shape 62"/>
           <p:cNvSpPr txBox="1"/>
           <p:nvPr>
             <p:ph type="ftr" idx="11"/>
@@ -6717,7 +6717,7 @@
       </p:sp>
       <p:sp>
         <p:nvSpPr>
-          <p:cNvPr id="1265610555" name="Shape 63"/>
+          <p:cNvPr id="790692746" name="Shape 63"/>
           <p:cNvSpPr txBox="1"/>
           <p:nvPr>
             <p:ph type="sldNum" idx="12"/>
@@ -6851,7 +6851,7 @@
       </p:grpSpPr>
       <p:sp>
         <p:nvSpPr>
-          <p:cNvPr id="1788996976" name="Shape 9"/>
+          <p:cNvPr id="2139939723" name="Shape 9"/>
           <p:cNvSpPr txBox="1"/>
           <p:nvPr>
             <p:ph type="title"/>
@@ -6991,7 +6991,7 @@
       </p:sp>
       <p:sp>
         <p:nvSpPr>
-          <p:cNvPr id="1961586985" name="Shape 10"/>
+          <p:cNvPr id="1557631034" name="Shape 10"/>
           <p:cNvSpPr txBox="1"/>
           <p:nvPr>
             <p:ph type="body" idx="1"/>
@@ -7179,7 +7179,7 @@
       </p:sp>
       <p:sp>
         <p:nvSpPr>
-          <p:cNvPr id="1527213641" name="Shape 11"/>
+          <p:cNvPr id="576643960" name="Shape 11"/>
           <p:cNvSpPr txBox="1"/>
           <p:nvPr>
             <p:ph type="body" idx="2"/>
@@ -7367,7 +7367,7 @@
       </p:sp>
       <p:sp>
         <p:nvSpPr>
-          <p:cNvPr id="1299186254" name="Shape 12"/>
+          <p:cNvPr id="746840724" name="Shape 12"/>
           <p:cNvSpPr txBox="1"/>
           <p:nvPr>
             <p:ph type="dt" idx="10"/>
@@ -7501,7 +7501,7 @@
       </p:sp>
       <p:sp>
         <p:nvSpPr>
-          <p:cNvPr id="1010654902" name="Shape 13"/>
+          <p:cNvPr id="1048936523" name="Shape 13"/>
           <p:cNvSpPr txBox="1"/>
           <p:nvPr>
             <p:ph type="ftr" idx="11"/>
@@ -7635,7 +7635,7 @@
       </p:sp>
       <p:sp>
         <p:nvSpPr>
-          <p:cNvPr id="882230437" name="Shape 14"/>
+          <p:cNvPr id="305287625" name="Shape 14"/>
           <p:cNvSpPr txBox="1"/>
           <p:nvPr>
             <p:ph type="sldNum" idx="12"/>
@@ -7769,7 +7769,7 @@
       </p:grpSpPr>
       <p:sp>
         <p:nvSpPr>
-          <p:cNvPr id="859533199" name="Shape 35"/>
+          <p:cNvPr id="1918615822" name="Shape 35"/>
           <p:cNvSpPr txBox="1"/>
           <p:nvPr>
             <p:ph type="title"/>
@@ -7909,7 +7909,7 @@
       </p:sp>
       <p:sp>
         <p:nvSpPr>
-          <p:cNvPr id="2014777480" name="Shape 36"/>
+          <p:cNvPr id="920559409" name="Shape 36"/>
           <p:cNvSpPr txBox="1"/>
           <p:nvPr>
             <p:ph type="body" idx="1"/>
@@ -8097,7 +8097,7 @@
       </p:sp>
       <p:sp>
         <p:nvSpPr>
-          <p:cNvPr id="515727825" name="Shape 37"/>
+          <p:cNvPr id="1850977403" name="Shape 37"/>
           <p:cNvSpPr txBox="1"/>
           <p:nvPr>
             <p:ph type="body" idx="2"/>
@@ -8285,7 +8285,7 @@
       </p:sp>
       <p:sp>
         <p:nvSpPr>
-          <p:cNvPr id="1443339434" name="Shape 38"/>
+          <p:cNvPr id="559244052" name="Shape 38"/>
           <p:cNvSpPr txBox="1"/>
           <p:nvPr>
             <p:ph type="body" idx="3"/>
@@ -8473,7 +8473,7 @@
       </p:sp>
       <p:sp>
         <p:nvSpPr>
-          <p:cNvPr id="867827360" name="Shape 39"/>
+          <p:cNvPr id="484858483" name="Shape 39"/>
           <p:cNvSpPr txBox="1"/>
           <p:nvPr>
             <p:ph type="body" idx="4"/>
@@ -8661,7 +8661,7 @@
       </p:sp>
       <p:sp>
         <p:nvSpPr>
-          <p:cNvPr id="2126534408" name="Shape 40"/>
+          <p:cNvPr id="1251998900" name="Shape 40"/>
           <p:cNvSpPr txBox="1"/>
           <p:nvPr>
             <p:ph type="dt" idx="10"/>
@@ -8795,7 +8795,7 @@
       </p:sp>
       <p:sp>
         <p:nvSpPr>
-          <p:cNvPr id="998866376" name="Shape 41"/>
+          <p:cNvPr id="1493461248" name="Shape 41"/>
           <p:cNvSpPr txBox="1"/>
           <p:nvPr>
             <p:ph type="ftr" idx="11"/>
@@ -8929,7 +8929,7 @@
       </p:sp>
       <p:sp>
         <p:nvSpPr>
-          <p:cNvPr id="1505579131" name="Shape 42"/>
+          <p:cNvPr id="30669961" name="Shape 42"/>
           <p:cNvSpPr txBox="1"/>
           <p:nvPr>
             <p:ph type="sldNum" idx="12"/>
@@ -9063,7 +9063,7 @@
       </p:grpSpPr>
       <p:sp>
         <p:nvSpPr>
-          <p:cNvPr id="2071497518" name="Shape 20"/>
+          <p:cNvPr id="1781355371" name="Shape 20"/>
           <p:cNvSpPr txBox="1"/>
           <p:nvPr>
             <p:ph type="title"/>
@@ -9203,7 +9203,7 @@
       </p:sp>
       <p:sp>
         <p:nvSpPr>
-          <p:cNvPr id="1030146939" name="Shape 21"/>
+          <p:cNvPr id="2075328593" name="Shape 21"/>
           <p:cNvSpPr txBox="1"/>
           <p:nvPr>
             <p:ph type="dt" idx="10"/>
@@ -9337,7 +9337,7 @@
       </p:sp>
       <p:sp>
         <p:nvSpPr>
-          <p:cNvPr id="730141292" name="Shape 22"/>
+          <p:cNvPr id="2067168846" name="Shape 22"/>
           <p:cNvSpPr txBox="1"/>
           <p:nvPr>
             <p:ph type="ftr" idx="11"/>
@@ -9471,7 +9471,7 @@
       </p:sp>
       <p:sp>
         <p:nvSpPr>
-          <p:cNvPr id="1500903266" name="Shape 23"/>
+          <p:cNvPr id="393149934" name="Shape 23"/>
           <p:cNvSpPr txBox="1"/>
           <p:nvPr>
             <p:ph type="sldNum" idx="12"/>
@@ -9605,7 +9605,7 @@
       </p:grpSpPr>
       <p:sp>
         <p:nvSpPr>
-          <p:cNvPr id="685371652" name="Shape 6"/>
+          <p:cNvPr id="1018788399" name="Shape 6"/>
           <p:cNvSpPr txBox="1"/>
           <p:nvPr>
             <p:ph type="dt" idx="10"/>
@@ -9739,7 +9739,7 @@
       </p:sp>
       <p:sp>
         <p:nvSpPr>
-          <p:cNvPr id="1121678864" name="Shape 7"/>
+          <p:cNvPr id="446861015" name="Shape 7"/>
           <p:cNvSpPr txBox="1"/>
           <p:nvPr>
             <p:ph type="ftr" idx="11"/>
@@ -9873,7 +9873,7 @@
       </p:sp>
       <p:sp>
         <p:nvSpPr>
-          <p:cNvPr id="136944022" name="Shape 8"/>
+          <p:cNvPr id="154839279" name="Shape 8"/>
           <p:cNvSpPr txBox="1"/>
           <p:nvPr>
             <p:ph type="sldNum" idx="12"/>
@@ -10007,7 +10007,7 @@
       </p:grpSpPr>
       <p:sp>
         <p:nvSpPr>
-          <p:cNvPr id="1380916765" name="Shape 43"/>
+          <p:cNvPr id="749878561" name="Shape 43"/>
           <p:cNvSpPr txBox="1"/>
           <p:nvPr>
             <p:ph type="title"/>
@@ -10148,7 +10148,7 @@
       </p:sp>
       <p:sp>
         <p:nvSpPr>
-          <p:cNvPr id="480873550" name="Shape 44"/>
+          <p:cNvPr id="1414595521" name="Shape 44"/>
           <p:cNvSpPr txBox="1"/>
           <p:nvPr>
             <p:ph type="body" idx="1"/>
@@ -10336,7 +10336,7 @@
       </p:sp>
       <p:sp>
         <p:nvSpPr>
-          <p:cNvPr id="1929163603" name="Shape 45"/>
+          <p:cNvPr id="1619711329" name="Shape 45"/>
           <p:cNvSpPr txBox="1"/>
           <p:nvPr>
             <p:ph type="body" idx="2"/>
@@ -10524,7 +10524,7 @@
       </p:sp>
       <p:sp>
         <p:nvSpPr>
-          <p:cNvPr id="1544026041" name="Shape 46"/>
+          <p:cNvPr id="674796152" name="Shape 46"/>
           <p:cNvSpPr txBox="1"/>
           <p:nvPr>
             <p:ph type="dt" idx="10"/>
@@ -10658,7 +10658,7 @@
       </p:sp>
       <p:sp>
         <p:nvSpPr>
-          <p:cNvPr id="602798568" name="Shape 47"/>
+          <p:cNvPr id="1444214245" name="Shape 47"/>
           <p:cNvSpPr txBox="1"/>
           <p:nvPr>
             <p:ph type="ftr" idx="11"/>
@@ -10792,7 +10792,7 @@
       </p:sp>
       <p:sp>
         <p:nvSpPr>
-          <p:cNvPr id="183825409" name="Shape 48"/>
+          <p:cNvPr id="620104193" name="Shape 48"/>
           <p:cNvSpPr txBox="1"/>
           <p:nvPr>
             <p:ph type="sldNum" idx="12"/>
@@ -10926,7 +10926,7 @@
       </p:grpSpPr>
       <p:sp>
         <p:nvSpPr>
-          <p:cNvPr id="301184189" name="Shape 24"/>
+          <p:cNvPr id="982634436" name="Shape 24"/>
           <p:cNvSpPr txBox="1"/>
           <p:nvPr>
             <p:ph type="title"/>
@@ -11067,7 +11067,7 @@
       </p:sp>
       <p:sp>
         <p:nvSpPr>
-          <p:cNvPr id="1863308010" name="Shape 25"/>
+          <p:cNvPr id="2003497953" name="Shape 25"/>
           <p:cNvSpPr/>
           <p:nvPr>
             <p:ph type="pic" idx="2"/>
@@ -11089,7 +11089,7 @@
       </p:sp>
       <p:sp>
         <p:nvSpPr>
-          <p:cNvPr id="1600723074" name="Shape 26"/>
+          <p:cNvPr id="1720913341" name="Shape 26"/>
           <p:cNvSpPr txBox="1"/>
           <p:nvPr>
             <p:ph type="body" idx="1"/>
@@ -11277,7 +11277,7 @@
       </p:sp>
       <p:sp>
         <p:nvSpPr>
-          <p:cNvPr id="324499891" name="Shape 27"/>
+          <p:cNvPr id="543227344" name="Shape 27"/>
           <p:cNvSpPr txBox="1"/>
           <p:nvPr>
             <p:ph type="dt" idx="10"/>
@@ -11411,7 +11411,7 @@
       </p:sp>
       <p:sp>
         <p:nvSpPr>
-          <p:cNvPr id="401172079" name="Shape 28"/>
+          <p:cNvPr id="126601480" name="Shape 28"/>
           <p:cNvSpPr txBox="1"/>
           <p:nvPr>
             <p:ph type="ftr" idx="11"/>
@@ -11545,7 +11545,7 @@
       </p:sp>
       <p:sp>
         <p:nvSpPr>
-          <p:cNvPr id="576622249" name="Shape 29"/>
+          <p:cNvPr id="1001166881" name="Shape 29"/>
           <p:cNvSpPr txBox="1"/>
           <p:nvPr>
             <p:ph type="sldNum" idx="12"/>
@@ -11686,7 +11686,7 @@
       </p:grpSpPr>
       <p:sp>
         <p:nvSpPr>
-          <p:cNvPr id="1095232599" name="Shape 1"/>
+          <p:cNvPr id="1629966692" name="Shape 1"/>
           <p:cNvSpPr txBox="1"/>
           <p:nvPr>
             <p:ph type="title"/>
@@ -11834,7 +11834,7 @@
       </p:sp>
       <p:sp>
         <p:nvSpPr>
-          <p:cNvPr id="608621669" name="Shape 2"/>
+          <p:cNvPr id="767200407" name="Shape 2"/>
           <p:cNvSpPr txBox="1"/>
           <p:nvPr>
             <p:ph type="body" idx="1"/>
@@ -12094,7 +12094,7 @@
       </p:sp>
       <p:sp>
         <p:nvSpPr>
-          <p:cNvPr id="852211206" name="Shape 3"/>
+          <p:cNvPr id="1613531802" name="Shape 3"/>
           <p:cNvSpPr txBox="1"/>
           <p:nvPr>
             <p:ph type="dt" idx="10"/>
@@ -12291,7 +12291,7 @@
       </p:sp>
       <p:sp>
         <p:nvSpPr>
-          <p:cNvPr id="858439365" name="Shape 4"/>
+          <p:cNvPr id="449829296" name="Shape 4"/>
           <p:cNvSpPr txBox="1"/>
           <p:nvPr>
             <p:ph type="ftr" idx="11"/>
@@ -12488,7 +12488,7 @@
       </p:sp>
       <p:sp>
         <p:nvSpPr>
-          <p:cNvPr id="78090499" name="Shape 5"/>
+          <p:cNvPr id="2077691574" name="Shape 5"/>
           <p:cNvSpPr txBox="1"/>
           <p:nvPr>
             <p:ph type="sldNum" idx="12"/>
@@ -14076,7 +14076,7 @@
       </p:grpSpPr>
       <p:pic>
         <p:nvPicPr>
-          <p:cNvPr id="199815159" name="Picture 2"/>
+          <p:cNvPr id="767983430" name="Picture 2"/>
           <p:cNvPicPr>
             <a:picLocks noChangeAspect="1"/>
           </p:cNvPicPr>
@@ -14104,7 +14104,7 @@
       </p:pic>
       <p:sp>
         <p:nvSpPr>
-          <p:cNvPr id="2089972140" name="AutoShape 3"/>
+          <p:cNvPr id="335442840" name="AutoShape 3"/>
           <p:cNvSpPr/>
           <p:nvPr/>
         </p:nvSpPr>
@@ -14142,7 +14142,7 @@
                 <a:ea typeface="Noto Sans SC"/>
                 <a:cs typeface="Noto Sans SC"/>
               </a:rPr>
-              <a:t>2026集团战略发展规划</a:t>
+              <a:t>2026集团战略发展规划12</a:t>
             </a:r>
             <a:endParaRPr lang="en-US" sz="1100"/>
           </a:p>
@@ -14150,7 +14150,7 @@
       </p:sp>
       <p:sp>
         <p:nvSpPr>
-          <p:cNvPr id="607490616" name="AutoShape 4"/>
+          <p:cNvPr id="985874178" name="AutoShape 4"/>
           <p:cNvSpPr/>
           <p:nvPr/>
         </p:nvSpPr>
@@ -14188,7 +14188,7 @@
       </p:sp>
       <p:sp>
         <p:nvSpPr>
-          <p:cNvPr id="1141899120" name="AutoShape 5"/>
+          <p:cNvPr id="1633242671" name="AutoShape 5"/>
           <p:cNvSpPr/>
           <p:nvPr/>
         </p:nvSpPr>
@@ -14236,7 +14236,7 @@
       </p:sp>
       <p:sp>
         <p:nvSpPr>
-          <p:cNvPr id="1022990047" name="AutoShape 6"/>
+          <p:cNvPr id="1800988865" name="AutoShape 6"/>
           <p:cNvSpPr/>
           <p:nvPr/>
         </p:nvSpPr>
@@ -14274,7 +14274,7 @@
       </p:sp>
       <p:sp>
         <p:nvSpPr>
-          <p:cNvPr id="1108414050" name="AutoShape 7"/>
+          <p:cNvPr id="1565328856" name="AutoShape 7"/>
           <p:cNvSpPr/>
           <p:nvPr/>
         </p:nvSpPr>
@@ -14374,7 +14374,7 @@
       </p:grpSpPr>
       <p:sp>
         <p:nvSpPr>
-          <p:cNvPr id="1772178808" name="AutoShape 2"/>
+          <p:cNvPr id="2073791818" name="AutoShape 2"/>
           <p:cNvSpPr/>
           <p:nvPr/>
         </p:nvSpPr>
@@ -14412,7 +14412,7 @@
       </p:sp>
       <p:sp>
         <p:nvSpPr>
-          <p:cNvPr id="947484173" name="AutoShape 3"/>
+          <p:cNvPr id="114071724" name="AutoShape 3"/>
           <p:cNvSpPr/>
           <p:nvPr/>
         </p:nvSpPr>
@@ -14458,7 +14458,7 @@
       </p:sp>
       <p:sp>
         <p:nvSpPr>
-          <p:cNvPr id="1762941757" name="AutoShape 4"/>
+          <p:cNvPr id="1127008592" name="AutoShape 4"/>
           <p:cNvSpPr/>
           <p:nvPr/>
         </p:nvSpPr>
@@ -14506,7 +14506,7 @@
       </p:sp>
       <p:cxnSp>
         <p:nvCxnSpPr>
-          <p:cNvPr id="819895496" name="Connector 5"/>
+          <p:cNvPr id="1912998028" name="Connector 5"/>
           <p:cNvCxnSpPr/>
           <p:nvPr/>
         </p:nvCxnSpPr>
@@ -14538,7 +14538,7 @@
       </p:cxnSp>
       <p:pic>
         <p:nvPicPr>
-          <p:cNvPr id="1916807194" name="Picture 6"/>
+          <p:cNvPr id="445363035" name="Picture 6"/>
           <p:cNvPicPr>
             <a:picLocks noChangeAspect="1"/>
           </p:cNvPicPr>
@@ -14566,7 +14566,7 @@
       </p:pic>
       <p:sp>
         <p:nvSpPr>
-          <p:cNvPr id="777859935" name="AutoShape 7"/>
+          <p:cNvPr id="1055696396" name="AutoShape 7"/>
           <p:cNvSpPr/>
           <p:nvPr/>
         </p:nvSpPr>
@@ -14612,7 +14612,7 @@
       </p:sp>
       <p:pic>
         <p:nvPicPr>
-          <p:cNvPr id="761365277" name="Picture 8"/>
+          <p:cNvPr id="34816201" name="Picture 8"/>
           <p:cNvPicPr>
             <a:picLocks noChangeAspect="1"/>
           </p:cNvPicPr>
@@ -14640,7 +14640,7 @@
       </p:pic>
       <p:sp>
         <p:nvSpPr>
-          <p:cNvPr id="1242815998" name="AutoShape 9"/>
+          <p:cNvPr id="1493935039" name="AutoShape 9"/>
           <p:cNvSpPr/>
           <p:nvPr/>
         </p:nvSpPr>
@@ -14688,7 +14688,7 @@
       </p:sp>
       <p:pic>
         <p:nvPicPr>
-          <p:cNvPr id="1242932328" name="Picture 10"/>
+          <p:cNvPr id="1574582585" name="Picture 10"/>
           <p:cNvPicPr>
             <a:picLocks noChangeAspect="1"/>
           </p:cNvPicPr>
@@ -14762,7 +14762,7 @@
       </p:grpSpPr>
       <p:sp>
         <p:nvSpPr>
-          <p:cNvPr id="2017831285" name="AutoShape 2"/>
+          <p:cNvPr id="1875411043" name="AutoShape 2"/>
           <p:cNvSpPr/>
           <p:nvPr/>
         </p:nvSpPr>
@@ -14808,7 +14808,7 @@
       </p:sp>
       <p:cxnSp>
         <p:nvCxnSpPr>
-          <p:cNvPr id="1130183628" name="Connector 3"/>
+          <p:cNvPr id="1730255612" name="Connector 3"/>
           <p:cNvCxnSpPr/>
           <p:nvPr/>
         </p:nvCxnSpPr>
@@ -14840,7 +14840,7 @@
       </p:cxnSp>
       <p:sp>
         <p:nvSpPr>
-          <p:cNvPr id="939024224" name="AutoShape 4"/>
+          <p:cNvPr id="1475802562" name="AutoShape 4"/>
           <p:cNvSpPr/>
           <p:nvPr/>
         </p:nvSpPr>
@@ -14882,7 +14882,7 @@
       </p:sp>
       <p:pic>
         <p:nvPicPr>
-          <p:cNvPr id="2025710592" name="Picture 5"/>
+          <p:cNvPr id="951402171" name="Picture 5"/>
           <p:cNvPicPr>
             <a:picLocks noChangeAspect="1"/>
           </p:cNvPicPr>
@@ -14910,7 +14910,7 @@
       </p:pic>
       <p:sp>
         <p:nvSpPr>
-          <p:cNvPr id="819785560" name="AutoShape 6"/>
+          <p:cNvPr id="1635466256" name="AutoShape 6"/>
           <p:cNvSpPr/>
           <p:nvPr/>
         </p:nvSpPr>
@@ -14978,7 +14978,7 @@
       </p:sp>
       <p:sp>
         <p:nvSpPr>
-          <p:cNvPr id="318450733" name="AutoShape 7"/>
+          <p:cNvPr id="117666203" name="AutoShape 7"/>
           <p:cNvSpPr/>
           <p:nvPr/>
         </p:nvSpPr>
@@ -15020,7 +15020,7 @@
       </p:sp>
       <p:pic>
         <p:nvPicPr>
-          <p:cNvPr id="259582269" name="Picture 8"/>
+          <p:cNvPr id="1331715507" name="Picture 8"/>
           <p:cNvPicPr>
             <a:picLocks noChangeAspect="1"/>
           </p:cNvPicPr>
@@ -15048,7 +15048,7 @@
       </p:pic>
       <p:sp>
         <p:nvSpPr>
-          <p:cNvPr id="467143818" name="AutoShape 9"/>
+          <p:cNvPr id="695141127" name="AutoShape 9"/>
           <p:cNvSpPr/>
           <p:nvPr/>
         </p:nvSpPr>
@@ -15116,7 +15116,7 @@
       </p:sp>
       <p:sp>
         <p:nvSpPr>
-          <p:cNvPr id="2118037003" name="AutoShape 10"/>
+          <p:cNvPr id="1206493701" name="AutoShape 10"/>
           <p:cNvSpPr/>
           <p:nvPr/>
         </p:nvSpPr>
@@ -15158,7 +15158,7 @@
       </p:sp>
       <p:pic>
         <p:nvPicPr>
-          <p:cNvPr id="680097151" name="Picture 11"/>
+          <p:cNvPr id="851415705" name="Picture 11"/>
           <p:cNvPicPr>
             <a:picLocks noChangeAspect="1"/>
           </p:cNvPicPr>
@@ -15186,7 +15186,7 @@
       </p:pic>
       <p:sp>
         <p:nvSpPr>
-          <p:cNvPr id="826946385" name="AutoShape 12"/>
+          <p:cNvPr id="1335375020" name="AutoShape 12"/>
           <p:cNvSpPr/>
           <p:nvPr/>
         </p:nvSpPr>
@@ -15254,7 +15254,7 @@
       </p:sp>
       <p:sp>
         <p:nvSpPr>
-          <p:cNvPr id="2021546842" name="AutoShape 13"/>
+          <p:cNvPr id="522255040" name="AutoShape 13"/>
           <p:cNvSpPr/>
           <p:nvPr/>
         </p:nvSpPr>
@@ -15296,7 +15296,7 @@
       </p:sp>
       <p:pic>
         <p:nvPicPr>
-          <p:cNvPr id="2077838631" name="Picture 14"/>
+          <p:cNvPr id="1364938431" name="Picture 14"/>
           <p:cNvPicPr>
             <a:picLocks noChangeAspect="1"/>
           </p:cNvPicPr>
@@ -15324,7 +15324,7 @@
       </p:pic>
       <p:sp>
         <p:nvSpPr>
-          <p:cNvPr id="307275054" name="AutoShape 15"/>
+          <p:cNvPr id="966242407" name="AutoShape 15"/>
           <p:cNvSpPr/>
           <p:nvPr/>
         </p:nvSpPr>
@@ -15392,7 +15392,7 @@
       </p:sp>
       <p:sp>
         <p:nvSpPr>
-          <p:cNvPr id="311722315" name="AutoShape 16"/>
+          <p:cNvPr id="976848239" name="AutoShape 16"/>
           <p:cNvSpPr/>
           <p:nvPr/>
         </p:nvSpPr>
@@ -15434,7 +15434,7 @@
       </p:sp>
       <p:pic>
         <p:nvPicPr>
-          <p:cNvPr id="1921375722" name="Picture 17"/>
+          <p:cNvPr id="550395688" name="Picture 17"/>
           <p:cNvPicPr>
             <a:picLocks noChangeAspect="1"/>
           </p:cNvPicPr>
@@ -15462,7 +15462,7 @@
       </p:pic>
       <p:sp>
         <p:nvSpPr>
-          <p:cNvPr id="33602537" name="AutoShape 18"/>
+          <p:cNvPr id="1994917544" name="AutoShape 18"/>
           <p:cNvSpPr/>
           <p:nvPr/>
         </p:nvSpPr>
@@ -15530,7 +15530,7 @@
       </p:sp>
       <p:sp>
         <p:nvSpPr>
-          <p:cNvPr id="1471148200" name="AutoShape 19"/>
+          <p:cNvPr id="1694379061" name="AutoShape 19"/>
           <p:cNvSpPr/>
           <p:nvPr/>
         </p:nvSpPr>
@@ -15572,7 +15572,7 @@
       </p:sp>
       <p:pic>
         <p:nvPicPr>
-          <p:cNvPr id="492722325" name="Picture 20"/>
+          <p:cNvPr id="1641441413" name="Picture 20"/>
           <p:cNvPicPr>
             <a:picLocks noChangeAspect="1"/>
           </p:cNvPicPr>
@@ -15600,7 +15600,7 @@
       </p:pic>
       <p:sp>
         <p:nvSpPr>
-          <p:cNvPr id="526139946" name="AutoShape 21"/>
+          <p:cNvPr id="714337797" name="AutoShape 21"/>
           <p:cNvSpPr/>
           <p:nvPr/>
         </p:nvSpPr>
@@ -15668,7 +15668,7 @@
       </p:sp>
       <p:sp>
         <p:nvSpPr>
-          <p:cNvPr id="591838285" name="AutoShape 22"/>
+          <p:cNvPr id="1193455599" name="AutoShape 22"/>
           <p:cNvSpPr/>
           <p:nvPr/>
         </p:nvSpPr>
@@ -15710,7 +15710,7 @@
       </p:sp>
       <p:pic>
         <p:nvPicPr>
-          <p:cNvPr id="1245984744" name="Picture 23"/>
+          <p:cNvPr id="837226144" name="Picture 23"/>
           <p:cNvPicPr>
             <a:picLocks noChangeAspect="1"/>
           </p:cNvPicPr>
@@ -15738,7 +15738,7 @@
       </p:pic>
       <p:sp>
         <p:nvSpPr>
-          <p:cNvPr id="13589237" name="AutoShape 24"/>
+          <p:cNvPr id="819458209" name="AutoShape 24"/>
           <p:cNvSpPr/>
           <p:nvPr/>
         </p:nvSpPr>
@@ -15858,7 +15858,7 @@
       </p:grpSpPr>
       <p:sp>
         <p:nvSpPr>
-          <p:cNvPr id="1882801843" name="AutoShape 2"/>
+          <p:cNvPr id="1584838606" name="AutoShape 2"/>
           <p:cNvSpPr/>
           <p:nvPr/>
         </p:nvSpPr>
@@ -15904,12 +15904,12 @@
       </p:sp>
       <p:cxnSp>
         <p:nvCxnSpPr>
-          <p:cNvPr id="1822908226" name="Connector 3"/>
+          <p:cNvPr id="519137444" name="Connector 3"/>
           <p:cNvCxnSpPr/>
           <p:nvPr/>
         </p:nvCxnSpPr>
         <p:spPr bwMode="auto">
-          <a:xfrm rot="-42968" flipH="0" flipV="0">
+          <a:xfrm rot="-42967" flipH="0" flipV="0">
             <a:off x="762040" y="1771650"/>
             <a:ext cx="1016000" cy="12700"/>
           </a:xfrm>
@@ -15936,7 +15936,7 @@
       </p:cxnSp>
       <p:sp>
         <p:nvSpPr>
-          <p:cNvPr id="955214702" name="AutoShape 4"/>
+          <p:cNvPr id="1387800416" name="AutoShape 4"/>
           <p:cNvSpPr/>
           <p:nvPr/>
         </p:nvSpPr>
@@ -15978,7 +15978,7 @@
       </p:sp>
       <p:pic>
         <p:nvPicPr>
-          <p:cNvPr id="2078441202" name="Picture 5"/>
+          <p:cNvPr id="252491279" name="Picture 5"/>
           <p:cNvPicPr>
             <a:picLocks noChangeAspect="1"/>
           </p:cNvPicPr>
@@ -16006,7 +16006,7 @@
       </p:pic>
       <p:sp>
         <p:nvSpPr>
-          <p:cNvPr id="1134183731" name="AutoShape 6"/>
+          <p:cNvPr id="1068284145" name="AutoShape 6"/>
           <p:cNvSpPr/>
           <p:nvPr/>
         </p:nvSpPr>
@@ -16074,7 +16074,7 @@
       </p:sp>
       <p:sp>
         <p:nvSpPr>
-          <p:cNvPr id="1463562592" name="AutoShape 7"/>
+          <p:cNvPr id="320547999" name="AutoShape 7"/>
           <p:cNvSpPr/>
           <p:nvPr/>
         </p:nvSpPr>
@@ -16116,7 +16116,7 @@
       </p:sp>
       <p:pic>
         <p:nvPicPr>
-          <p:cNvPr id="1985870397" name="Picture 8"/>
+          <p:cNvPr id="1404158987" name="Picture 8"/>
           <p:cNvPicPr>
             <a:picLocks noChangeAspect="1"/>
           </p:cNvPicPr>
@@ -16144,7 +16144,7 @@
       </p:pic>
       <p:sp>
         <p:nvSpPr>
-          <p:cNvPr id="1249440610" name="AutoShape 9"/>
+          <p:cNvPr id="985804562" name="AutoShape 9"/>
           <p:cNvSpPr/>
           <p:nvPr/>
         </p:nvSpPr>
@@ -16212,7 +16212,7 @@
       </p:sp>
       <p:sp>
         <p:nvSpPr>
-          <p:cNvPr id="1055066192" name="AutoShape 10"/>
+          <p:cNvPr id="1024243234" name="AutoShape 10"/>
           <p:cNvSpPr/>
           <p:nvPr/>
         </p:nvSpPr>
@@ -16254,7 +16254,7 @@
       </p:sp>
       <p:pic>
         <p:nvPicPr>
-          <p:cNvPr id="1399815673" name="Picture 11"/>
+          <p:cNvPr id="2073468272" name="Picture 11"/>
           <p:cNvPicPr>
             <a:picLocks noChangeAspect="1"/>
           </p:cNvPicPr>
@@ -16282,7 +16282,7 @@
       </p:pic>
       <p:sp>
         <p:nvSpPr>
-          <p:cNvPr id="1712709588" name="AutoShape 12"/>
+          <p:cNvPr id="2138060390" name="AutoShape 12"/>
           <p:cNvSpPr/>
           <p:nvPr/>
         </p:nvSpPr>
@@ -16350,7 +16350,7 @@
       </p:sp>
       <p:sp>
         <p:nvSpPr>
-          <p:cNvPr id="1626707352" name="AutoShape 13"/>
+          <p:cNvPr id="1354629741" name="AutoShape 13"/>
           <p:cNvSpPr/>
           <p:nvPr/>
         </p:nvSpPr>
@@ -16392,7 +16392,7 @@
       </p:sp>
       <p:pic>
         <p:nvPicPr>
-          <p:cNvPr id="1134191063" name="Picture 14"/>
+          <p:cNvPr id="1488615213" name="Picture 14"/>
           <p:cNvPicPr>
             <a:picLocks noChangeAspect="1"/>
           </p:cNvPicPr>
@@ -16420,7 +16420,7 @@
       </p:pic>
       <p:sp>
         <p:nvSpPr>
-          <p:cNvPr id="1772442623" name="AutoShape 15"/>
+          <p:cNvPr id="1513811469" name="AutoShape 15"/>
           <p:cNvSpPr/>
           <p:nvPr/>
         </p:nvSpPr>
@@ -16466,12 +16466,12 @@
       </p:sp>
       <p:cxnSp>
         <p:nvCxnSpPr>
-          <p:cNvPr id="176809948" name="Connector 16"/>
+          <p:cNvPr id="1128025936" name="Connector 16"/>
           <p:cNvCxnSpPr/>
           <p:nvPr/>
         </p:nvCxnSpPr>
         <p:spPr bwMode="auto">
-          <a:xfrm rot="-10741" flipH="0" flipV="0">
+          <a:xfrm rot="-10740" flipH="0" flipV="0">
             <a:off x="6858010" y="3930650"/>
             <a:ext cx="4064000" cy="12700"/>
           </a:xfrm>
@@ -16498,12 +16498,12 @@
       </p:cxnSp>
       <p:cxnSp>
         <p:nvCxnSpPr>
-          <p:cNvPr id="1258049539" name="Connector 17"/>
+          <p:cNvPr id="1525309004" name="Connector 17"/>
           <p:cNvCxnSpPr/>
           <p:nvPr/>
         </p:nvCxnSpPr>
         <p:spPr bwMode="auto">
-          <a:xfrm rot="-10741" flipH="0" flipV="0">
+          <a:xfrm rot="-10740" flipH="0" flipV="0">
             <a:off x="6858010" y="4311650"/>
             <a:ext cx="4064000" cy="12700"/>
           </a:xfrm>
@@ -16530,12 +16530,12 @@
       </p:cxnSp>
       <p:cxnSp>
         <p:nvCxnSpPr>
-          <p:cNvPr id="2134668729" name="Connector 18"/>
+          <p:cNvPr id="1440105297" name="Connector 18"/>
           <p:cNvCxnSpPr/>
           <p:nvPr/>
         </p:nvCxnSpPr>
         <p:spPr bwMode="auto">
-          <a:xfrm rot="-10741" flipH="0" flipV="0">
+          <a:xfrm rot="-10740" flipH="0" flipV="0">
             <a:off x="6858010" y="4692650"/>
             <a:ext cx="4064000" cy="12700"/>
           </a:xfrm>
@@ -16562,7 +16562,7 @@
       </p:cxnSp>
       <p:sp>
         <p:nvSpPr>
-          <p:cNvPr id="1862848141" name="AutoShape 19"/>
+          <p:cNvPr id="1915082069" name="AutoShape 19"/>
           <p:cNvSpPr/>
           <p:nvPr/>
         </p:nvSpPr>
@@ -16598,7 +16598,7 @@
       </p:sp>
       <p:sp>
         <p:nvSpPr>
-          <p:cNvPr id="569864979" name="AutoShape 20"/>
+          <p:cNvPr id="922523531" name="AutoShape 20"/>
           <p:cNvSpPr/>
           <p:nvPr/>
         </p:nvSpPr>
@@ -16634,7 +16634,7 @@
       </p:sp>
       <p:sp>
         <p:nvSpPr>
-          <p:cNvPr id="1051930875" name="AutoShape 21"/>
+          <p:cNvPr id="2067536160" name="AutoShape 21"/>
           <p:cNvSpPr/>
           <p:nvPr/>
         </p:nvSpPr>
@@ -16670,7 +16670,7 @@
       </p:sp>
       <p:sp>
         <p:nvSpPr>
-          <p:cNvPr id="1234271437" name="AutoShape 22"/>
+          <p:cNvPr id="1782229377" name="AutoShape 22"/>
           <p:cNvSpPr/>
           <p:nvPr/>
         </p:nvSpPr>
@@ -16770,7 +16770,7 @@
       </p:grpSpPr>
       <p:sp>
         <p:nvSpPr>
-          <p:cNvPr id="382518079" name="AutoShape 2"/>
+          <p:cNvPr id="1038104553" name="AutoShape 2"/>
           <p:cNvSpPr/>
           <p:nvPr/>
         </p:nvSpPr>
@@ -16816,7 +16816,7 @@
       </p:sp>
       <p:sp>
         <p:nvSpPr>
-          <p:cNvPr id="724701031" name="AutoShape 3"/>
+          <p:cNvPr id="1940450696" name="AutoShape 3"/>
           <p:cNvSpPr/>
           <p:nvPr/>
         </p:nvSpPr>
@@ -16854,7 +16854,7 @@
       </p:sp>
       <p:sp>
         <p:nvSpPr>
-          <p:cNvPr id="1566861559" name="AutoShape 4"/>
+          <p:cNvPr id="760260797" name="AutoShape 4"/>
           <p:cNvSpPr/>
           <p:nvPr/>
         </p:nvSpPr>
@@ -16896,7 +16896,7 @@
       </p:sp>
       <p:pic>
         <p:nvPicPr>
-          <p:cNvPr id="1491253291" name="Picture 5"/>
+          <p:cNvPr id="1575092706" name="Picture 5"/>
           <p:cNvPicPr>
             <a:picLocks noChangeAspect="1"/>
           </p:cNvPicPr>
@@ -16918,7 +16918,7 @@
       </p:pic>
       <p:sp>
         <p:nvSpPr>
-          <p:cNvPr id="1297291146" name="AutoShape 6"/>
+          <p:cNvPr id="1638826212" name="AutoShape 6"/>
           <p:cNvSpPr/>
           <p:nvPr/>
         </p:nvSpPr>
@@ -16964,7 +16964,7 @@
       </p:sp>
       <p:cxnSp>
         <p:nvCxnSpPr>
-          <p:cNvPr id="795390267" name="Connector 7"/>
+          <p:cNvPr id="1748884197" name="Connector 7"/>
           <p:cNvCxnSpPr/>
           <p:nvPr/>
         </p:nvCxnSpPr>
@@ -16996,7 +16996,7 @@
       </p:cxnSp>
       <p:sp>
         <p:nvSpPr>
-          <p:cNvPr id="2105842969" name="AutoShape 8"/>
+          <p:cNvPr id="245490067" name="AutoShape 8"/>
           <p:cNvSpPr/>
           <p:nvPr/>
         </p:nvSpPr>
@@ -17044,7 +17044,7 @@
       </p:sp>
       <p:sp>
         <p:nvSpPr>
-          <p:cNvPr id="373863447" name="AutoShape 9"/>
+          <p:cNvPr id="1855606421" name="AutoShape 9"/>
           <p:cNvSpPr/>
           <p:nvPr/>
         </p:nvSpPr>
@@ -17086,7 +17086,7 @@
       </p:sp>
       <p:pic>
         <p:nvPicPr>
-          <p:cNvPr id="1987294244" name="Picture 10"/>
+          <p:cNvPr id="241579892" name="Picture 10"/>
           <p:cNvPicPr>
             <a:picLocks noChangeAspect="1"/>
           </p:cNvPicPr>
@@ -17114,7 +17114,7 @@
       </p:pic>
       <p:sp>
         <p:nvSpPr>
-          <p:cNvPr id="704485499" name="AutoShape 11"/>
+          <p:cNvPr id="2109372061" name="AutoShape 11"/>
           <p:cNvSpPr/>
           <p:nvPr/>
         </p:nvSpPr>
@@ -17160,7 +17160,7 @@
       </p:sp>
       <p:cxnSp>
         <p:nvCxnSpPr>
-          <p:cNvPr id="552277939" name="Connector 12"/>
+          <p:cNvPr id="312073033" name="Connector 12"/>
           <p:cNvCxnSpPr/>
           <p:nvPr/>
         </p:nvCxnSpPr>
@@ -17192,7 +17192,7 @@
       </p:cxnSp>
       <p:sp>
         <p:nvSpPr>
-          <p:cNvPr id="1310219964" name="AutoShape 13"/>
+          <p:cNvPr id="1621168146" name="AutoShape 13"/>
           <p:cNvSpPr/>
           <p:nvPr/>
         </p:nvSpPr>
@@ -17240,7 +17240,7 @@
       </p:sp>
       <p:sp>
         <p:nvSpPr>
-          <p:cNvPr id="556967534" name="AutoShape 14"/>
+          <p:cNvPr id="360093794" name="AutoShape 14"/>
           <p:cNvSpPr/>
           <p:nvPr/>
         </p:nvSpPr>
@@ -17282,7 +17282,7 @@
       </p:sp>
       <p:pic>
         <p:nvPicPr>
-          <p:cNvPr id="1386302588" name="Picture 15"/>
+          <p:cNvPr id="1291730363" name="Picture 15"/>
           <p:cNvPicPr>
             <a:picLocks noChangeAspect="1"/>
           </p:cNvPicPr>
@@ -17310,7 +17310,7 @@
       </p:pic>
       <p:sp>
         <p:nvSpPr>
-          <p:cNvPr id="1884244856" name="AutoShape 16"/>
+          <p:cNvPr id="139228441" name="AutoShape 16"/>
           <p:cNvSpPr/>
           <p:nvPr/>
         </p:nvSpPr>
@@ -17356,7 +17356,7 @@
       </p:sp>
       <p:cxnSp>
         <p:nvCxnSpPr>
-          <p:cNvPr id="1008936547" name="Connector 17"/>
+          <p:cNvPr id="1689168790" name="Connector 17"/>
           <p:cNvCxnSpPr/>
           <p:nvPr/>
         </p:nvCxnSpPr>
@@ -17388,7 +17388,7 @@
       </p:cxnSp>
       <p:sp>
         <p:nvSpPr>
-          <p:cNvPr id="1066086471" name="AutoShape 18"/>
+          <p:cNvPr id="362455571" name="AutoShape 18"/>
           <p:cNvSpPr/>
           <p:nvPr/>
         </p:nvSpPr>
@@ -17510,7 +17510,7 @@
       </p:grpSpPr>
       <p:sp>
         <p:nvSpPr>
-          <p:cNvPr id="242551198" name="AutoShape 2"/>
+          <p:cNvPr id="1539448298" name="AutoShape 2"/>
           <p:cNvSpPr/>
           <p:nvPr/>
         </p:nvSpPr>
@@ -17556,7 +17556,7 @@
       </p:sp>
       <p:sp>
         <p:nvSpPr>
-          <p:cNvPr id="856015682" name="AutoShape 3"/>
+          <p:cNvPr id="1416041839" name="AutoShape 3"/>
           <p:cNvSpPr/>
           <p:nvPr/>
         </p:nvSpPr>
@@ -17598,7 +17598,7 @@
       </p:sp>
       <p:sp>
         <p:nvSpPr>
-          <p:cNvPr id="2131359" name="AutoShape 4"/>
+          <p:cNvPr id="391079155" name="AutoShape 4"/>
           <p:cNvSpPr/>
           <p:nvPr/>
         </p:nvSpPr>
@@ -17644,7 +17644,7 @@
       </p:sp>
       <p:cxnSp>
         <p:nvCxnSpPr>
-          <p:cNvPr id="1943064320" name="Connector 5"/>
+          <p:cNvPr id="283443759" name="Connector 5"/>
           <p:cNvCxnSpPr/>
           <p:nvPr/>
         </p:nvCxnSpPr>
@@ -17676,7 +17676,7 @@
       </p:cxnSp>
       <p:pic>
         <p:nvPicPr>
-          <p:cNvPr id="1984716516" name="Picture 6"/>
+          <p:cNvPr id="747808477" name="Picture 6"/>
           <p:cNvPicPr>
             <a:picLocks noChangeAspect="1"/>
           </p:cNvPicPr>
@@ -17704,7 +17704,7 @@
       </p:pic>
       <p:sp>
         <p:nvSpPr>
-          <p:cNvPr id="1912548550" name="AutoShape 7"/>
+          <p:cNvPr id="1621012647" name="AutoShape 7"/>
           <p:cNvSpPr/>
           <p:nvPr/>
         </p:nvSpPr>
@@ -17772,7 +17772,7 @@
       </p:sp>
       <p:pic>
         <p:nvPicPr>
-          <p:cNvPr id="272100382" name="Picture 8"/>
+          <p:cNvPr id="494824963" name="Picture 8"/>
           <p:cNvPicPr>
             <a:picLocks noChangeAspect="1"/>
           </p:cNvPicPr>
@@ -17800,7 +17800,7 @@
       </p:pic>
       <p:sp>
         <p:nvSpPr>
-          <p:cNvPr id="556098150" name="AutoShape 9"/>
+          <p:cNvPr id="642757069" name="AutoShape 9"/>
           <p:cNvSpPr/>
           <p:nvPr/>
         </p:nvSpPr>
@@ -17868,7 +17868,7 @@
       </p:sp>
       <p:pic>
         <p:nvPicPr>
-          <p:cNvPr id="987495715" name="Picture 10"/>
+          <p:cNvPr id="900807118" name="Picture 10"/>
           <p:cNvPicPr>
             <a:picLocks noChangeAspect="1"/>
           </p:cNvPicPr>
@@ -17896,7 +17896,7 @@
       </p:pic>
       <p:sp>
         <p:nvSpPr>
-          <p:cNvPr id="302491414" name="AutoShape 11"/>
+          <p:cNvPr id="1638781824" name="AutoShape 11"/>
           <p:cNvSpPr/>
           <p:nvPr/>
         </p:nvSpPr>
@@ -17964,7 +17964,7 @@
       </p:sp>
       <p:sp>
         <p:nvSpPr>
-          <p:cNvPr id="950371724" name="AutoShape 12"/>
+          <p:cNvPr id="137112267" name="AutoShape 12"/>
           <p:cNvSpPr/>
           <p:nvPr/>
         </p:nvSpPr>
@@ -18006,7 +18006,7 @@
       </p:sp>
       <p:sp>
         <p:nvSpPr>
-          <p:cNvPr id="1460275992" name="AutoShape 13"/>
+          <p:cNvPr id="1446674583" name="AutoShape 13"/>
           <p:cNvSpPr/>
           <p:nvPr/>
         </p:nvSpPr>
@@ -18052,7 +18052,7 @@
       </p:sp>
       <p:cxnSp>
         <p:nvCxnSpPr>
-          <p:cNvPr id="1296481465" name="Connector 14"/>
+          <p:cNvPr id="1273222367" name="Connector 14"/>
           <p:cNvCxnSpPr/>
           <p:nvPr/>
         </p:nvCxnSpPr>
@@ -18084,7 +18084,7 @@
       </p:cxnSp>
       <p:sp>
         <p:nvSpPr>
-          <p:cNvPr id="1843058778" name="AutoShape 15"/>
+          <p:cNvPr id="1997758713" name="AutoShape 15"/>
           <p:cNvSpPr/>
           <p:nvPr/>
         </p:nvSpPr>
@@ -18122,7 +18122,7 @@
       </p:sp>
       <p:pic>
         <p:nvPicPr>
-          <p:cNvPr id="1223181656" name="Picture 16"/>
+          <p:cNvPr id="380003178" name="Picture 16"/>
           <p:cNvPicPr>
             <a:picLocks noChangeAspect="1"/>
           </p:cNvPicPr>
@@ -18150,7 +18150,7 @@
       </p:pic>
       <p:sp>
         <p:nvSpPr>
-          <p:cNvPr id="24348337" name="AutoShape 17"/>
+          <p:cNvPr id="1887185659" name="AutoShape 17"/>
           <p:cNvSpPr/>
           <p:nvPr/>
         </p:nvSpPr>
@@ -18218,7 +18218,7 @@
       </p:sp>
       <p:sp>
         <p:nvSpPr>
-          <p:cNvPr id="725356672" name="AutoShape 18"/>
+          <p:cNvPr id="1883115379" name="AutoShape 18"/>
           <p:cNvSpPr/>
           <p:nvPr/>
         </p:nvSpPr>
@@ -18256,7 +18256,7 @@
       </p:sp>
       <p:pic>
         <p:nvPicPr>
-          <p:cNvPr id="844054499" name="Picture 19"/>
+          <p:cNvPr id="479597095" name="Picture 19"/>
           <p:cNvPicPr>
             <a:picLocks noChangeAspect="1"/>
           </p:cNvPicPr>
@@ -18284,7 +18284,7 @@
       </p:pic>
       <p:sp>
         <p:nvSpPr>
-          <p:cNvPr id="725646641" name="AutoShape 20"/>
+          <p:cNvPr id="715868912" name="AutoShape 20"/>
           <p:cNvSpPr/>
           <p:nvPr/>
         </p:nvSpPr>
@@ -18352,7 +18352,7 @@
       </p:sp>
       <p:sp>
         <p:nvSpPr>
-          <p:cNvPr id="1372736470" name="AutoShape 21"/>
+          <p:cNvPr id="2005334669" name="AutoShape 21"/>
           <p:cNvSpPr/>
           <p:nvPr/>
         </p:nvSpPr>
@@ -18390,7 +18390,7 @@
       </p:sp>
       <p:pic>
         <p:nvPicPr>
-          <p:cNvPr id="1118719777" name="Picture 22"/>
+          <p:cNvPr id="437039106" name="Picture 22"/>
           <p:cNvPicPr>
             <a:picLocks noChangeAspect="1"/>
           </p:cNvPicPr>
@@ -18418,7 +18418,7 @@
       </p:pic>
       <p:sp>
         <p:nvSpPr>
-          <p:cNvPr id="1684199908" name="AutoShape 23"/>
+          <p:cNvPr id="547529333" name="AutoShape 23"/>
           <p:cNvSpPr/>
           <p:nvPr/>
         </p:nvSpPr>
@@ -18486,7 +18486,7 @@
       </p:sp>
       <p:sp>
         <p:nvSpPr>
-          <p:cNvPr id="1505953278" name="AutoShape 24"/>
+          <p:cNvPr id="615710495" name="AutoShape 24"/>
           <p:cNvSpPr/>
           <p:nvPr/>
         </p:nvSpPr>
@@ -18524,7 +18524,7 @@
       </p:sp>
       <p:pic>
         <p:nvPicPr>
-          <p:cNvPr id="124647867" name="Picture 25"/>
+          <p:cNvPr id="767991469" name="Picture 25"/>
           <p:cNvPicPr>
             <a:picLocks noChangeAspect="1"/>
           </p:cNvPicPr>
@@ -18552,7 +18552,7 @@
       </p:pic>
       <p:sp>
         <p:nvSpPr>
-          <p:cNvPr id="1272005624" name="AutoShape 26"/>
+          <p:cNvPr id="1015460060" name="AutoShape 26"/>
           <p:cNvSpPr/>
           <p:nvPr/>
         </p:nvSpPr>
@@ -18672,7 +18672,7 @@
       </p:grpSpPr>
       <p:sp>
         <p:nvSpPr>
-          <p:cNvPr id="1439206464" name="AutoShape 2"/>
+          <p:cNvPr id="1645162001" name="AutoShape 2"/>
           <p:cNvSpPr/>
           <p:nvPr/>
         </p:nvSpPr>
@@ -18718,12 +18718,12 @@
       </p:sp>
       <p:cxnSp>
         <p:nvCxnSpPr>
-          <p:cNvPr id="1874275334" name="Connector 3"/>
+          <p:cNvPr id="87069386" name="Connector 3"/>
           <p:cNvCxnSpPr/>
           <p:nvPr/>
         </p:nvCxnSpPr>
         <p:spPr bwMode="auto">
-          <a:xfrm rot="-42968" flipH="0" flipV="0">
+          <a:xfrm rot="-42967" flipH="0" flipV="0">
             <a:off x="762040" y="1771650"/>
             <a:ext cx="1016000" cy="12700"/>
           </a:xfrm>
@@ -18750,7 +18750,7 @@
       </p:cxnSp>
       <p:sp>
         <p:nvSpPr>
-          <p:cNvPr id="2077310592" name="AutoShape 4"/>
+          <p:cNvPr id="1031244404" name="AutoShape 4"/>
           <p:cNvSpPr/>
           <p:nvPr/>
         </p:nvSpPr>
@@ -18792,7 +18792,7 @@
       </p:sp>
       <p:pic>
         <p:nvPicPr>
-          <p:cNvPr id="2087956107" name="Picture 5"/>
+          <p:cNvPr id="23169820" name="Picture 5"/>
           <p:cNvPicPr>
             <a:picLocks noChangeAspect="1"/>
           </p:cNvPicPr>
@@ -18820,7 +18820,7 @@
       </p:pic>
       <p:sp>
         <p:nvSpPr>
-          <p:cNvPr id="1885307011" name="AutoShape 6"/>
+          <p:cNvPr id="1962675982" name="AutoShape 6"/>
           <p:cNvSpPr/>
           <p:nvPr/>
         </p:nvSpPr>
@@ -18866,7 +18866,7 @@
       </p:sp>
       <p:sp>
         <p:nvSpPr>
-          <p:cNvPr id="1402343481" name="AutoShape 7"/>
+          <p:cNvPr id="598258734" name="AutoShape 7"/>
           <p:cNvSpPr/>
           <p:nvPr/>
         </p:nvSpPr>
@@ -18970,7 +18970,7 @@
       </p:sp>
       <p:sp>
         <p:nvSpPr>
-          <p:cNvPr id="1795149579" name="AutoShape 8"/>
+          <p:cNvPr id="425419107" name="AutoShape 8"/>
           <p:cNvSpPr/>
           <p:nvPr/>
         </p:nvSpPr>
@@ -19012,7 +19012,7 @@
       </p:sp>
       <p:pic>
         <p:nvPicPr>
-          <p:cNvPr id="1741692501" name="Picture 9"/>
+          <p:cNvPr id="1378045953" name="Picture 9"/>
           <p:cNvPicPr>
             <a:picLocks noChangeAspect="1"/>
           </p:cNvPicPr>
@@ -19040,7 +19040,7 @@
       </p:pic>
       <p:sp>
         <p:nvSpPr>
-          <p:cNvPr id="1612404783" name="AutoShape 10"/>
+          <p:cNvPr id="2053788506" name="AutoShape 10"/>
           <p:cNvSpPr/>
           <p:nvPr/>
         </p:nvSpPr>
@@ -19086,7 +19086,7 @@
       </p:sp>
       <p:sp>
         <p:nvSpPr>
-          <p:cNvPr id="1556662023" name="AutoShape 11"/>
+          <p:cNvPr id="1567491729" name="AutoShape 11"/>
           <p:cNvSpPr/>
           <p:nvPr/>
         </p:nvSpPr>
@@ -19190,7 +19190,7 @@
       </p:sp>
       <p:sp>
         <p:nvSpPr>
-          <p:cNvPr id="1845070308" name="AutoShape 12"/>
+          <p:cNvPr id="1204878881" name="AutoShape 12"/>
           <p:cNvSpPr/>
           <p:nvPr/>
         </p:nvSpPr>
@@ -19232,7 +19232,7 @@
       </p:sp>
       <p:pic>
         <p:nvPicPr>
-          <p:cNvPr id="347783732" name="Picture 13"/>
+          <p:cNvPr id="713220272" name="Picture 13"/>
           <p:cNvPicPr>
             <a:picLocks noChangeAspect="1"/>
           </p:cNvPicPr>
@@ -19260,7 +19260,7 @@
       </p:pic>
       <p:sp>
         <p:nvSpPr>
-          <p:cNvPr id="697780035" name="AutoShape 14"/>
+          <p:cNvPr id="2098025954" name="AutoShape 14"/>
           <p:cNvSpPr/>
           <p:nvPr/>
         </p:nvSpPr>
@@ -19306,7 +19306,7 @@
       </p:sp>
       <p:sp>
         <p:nvSpPr>
-          <p:cNvPr id="945096250" name="AutoShape 15"/>
+          <p:cNvPr id="1252482345" name="AutoShape 15"/>
           <p:cNvSpPr/>
           <p:nvPr/>
         </p:nvSpPr>
@@ -19410,7 +19410,7 @@
       </p:sp>
       <p:sp>
         <p:nvSpPr>
-          <p:cNvPr id="1069702024" name="AutoShape 16"/>
+          <p:cNvPr id="519270742" name="AutoShape 16"/>
           <p:cNvSpPr/>
           <p:nvPr/>
         </p:nvSpPr>
@@ -19452,7 +19452,7 @@
       </p:sp>
       <p:pic>
         <p:nvPicPr>
-          <p:cNvPr id="1680631685" name="Picture 17"/>
+          <p:cNvPr id="2017295514" name="Picture 17"/>
           <p:cNvPicPr>
             <a:picLocks noChangeAspect="1"/>
           </p:cNvPicPr>
@@ -19480,7 +19480,7 @@
       </p:pic>
       <p:sp>
         <p:nvSpPr>
-          <p:cNvPr id="103903929" name="AutoShape 18"/>
+          <p:cNvPr id="353671697" name="AutoShape 18"/>
           <p:cNvSpPr/>
           <p:nvPr/>
         </p:nvSpPr>
@@ -19526,7 +19526,7 @@
       </p:sp>
       <p:sp>
         <p:nvSpPr>
-          <p:cNvPr id="2049880915" name="AutoShape 19"/>
+          <p:cNvPr id="1018892335" name="AutoShape 19"/>
           <p:cNvSpPr/>
           <p:nvPr/>
         </p:nvSpPr>
@@ -19682,7 +19682,7 @@
       </p:grpSpPr>
       <p:sp>
         <p:nvSpPr>
-          <p:cNvPr id="1039801775" name="AutoShape 2"/>
+          <p:cNvPr id="620603121" name="AutoShape 2"/>
           <p:cNvSpPr/>
           <p:nvPr/>
         </p:nvSpPr>
@@ -19728,7 +19728,7 @@
       </p:sp>
       <p:sp>
         <p:nvSpPr>
-          <p:cNvPr id="962497208" name="AutoShape 3"/>
+          <p:cNvPr id="1900452070" name="AutoShape 3"/>
           <p:cNvSpPr/>
           <p:nvPr/>
         </p:nvSpPr>
@@ -19770,7 +19770,7 @@
       </p:sp>
       <p:pic>
         <p:nvPicPr>
-          <p:cNvPr id="1723506016" name="Picture 4"/>
+          <p:cNvPr id="2137618961" name="Picture 4"/>
           <p:cNvPicPr>
             <a:picLocks noChangeAspect="1"/>
           </p:cNvPicPr>
@@ -19798,7 +19798,7 @@
       </p:pic>
       <p:sp>
         <p:nvSpPr>
-          <p:cNvPr id="1150231823" name="AutoShape 5"/>
+          <p:cNvPr id="1353629866" name="AutoShape 5"/>
           <p:cNvSpPr/>
           <p:nvPr/>
         </p:nvSpPr>
@@ -19844,7 +19844,7 @@
       </p:sp>
       <p:cxnSp>
         <p:nvCxnSpPr>
-          <p:cNvPr id="1348071510" name="Connector 6"/>
+          <p:cNvPr id="569472022" name="Connector 6"/>
           <p:cNvCxnSpPr/>
           <p:nvPr/>
         </p:nvCxnSpPr>
@@ -19876,7 +19876,7 @@
       </p:cxnSp>
       <p:sp>
         <p:nvSpPr>
-          <p:cNvPr id="1607082996" name="AutoShape 7"/>
+          <p:cNvPr id="168597731" name="AutoShape 7"/>
           <p:cNvSpPr/>
           <p:nvPr/>
         </p:nvSpPr>
@@ -19998,7 +19998,7 @@
       </p:sp>
       <p:sp>
         <p:nvSpPr>
-          <p:cNvPr id="1553493486" name="AutoShape 8"/>
+          <p:cNvPr id="1395440977" name="AutoShape 8"/>
           <p:cNvSpPr/>
           <p:nvPr/>
         </p:nvSpPr>
@@ -20040,7 +20040,7 @@
       </p:sp>
       <p:pic>
         <p:nvPicPr>
-          <p:cNvPr id="1718470113" name="Picture 9"/>
+          <p:cNvPr id="1096191651" name="Picture 9"/>
           <p:cNvPicPr>
             <a:picLocks noChangeAspect="1"/>
           </p:cNvPicPr>
@@ -20068,7 +20068,7 @@
       </p:pic>
       <p:sp>
         <p:nvSpPr>
-          <p:cNvPr id="643029219" name="AutoShape 10"/>
+          <p:cNvPr id="1508053002" name="AutoShape 10"/>
           <p:cNvSpPr/>
           <p:nvPr/>
         </p:nvSpPr>
@@ -20114,7 +20114,7 @@
       </p:sp>
       <p:cxnSp>
         <p:nvCxnSpPr>
-          <p:cNvPr id="22682827" name="Connector 11"/>
+          <p:cNvPr id="1093961738" name="Connector 11"/>
           <p:cNvCxnSpPr/>
           <p:nvPr/>
         </p:nvCxnSpPr>
@@ -20146,7 +20146,7 @@
       </p:cxnSp>
       <p:sp>
         <p:nvSpPr>
-          <p:cNvPr id="503922407" name="AutoShape 12"/>
+          <p:cNvPr id="459873495" name="AutoShape 12"/>
           <p:cNvSpPr/>
           <p:nvPr/>
         </p:nvSpPr>
@@ -20268,7 +20268,7 @@
       </p:sp>
       <p:sp>
         <p:nvSpPr>
-          <p:cNvPr id="133153699" name="AutoShape 13"/>
+          <p:cNvPr id="1106788160" name="AutoShape 13"/>
           <p:cNvSpPr/>
           <p:nvPr/>
         </p:nvSpPr>
@@ -20310,7 +20310,7 @@
       </p:sp>
       <p:pic>
         <p:nvPicPr>
-          <p:cNvPr id="1668812245" name="Picture 14"/>
+          <p:cNvPr id="1651180736" name="Picture 14"/>
           <p:cNvPicPr>
             <a:picLocks noChangeAspect="1"/>
           </p:cNvPicPr>
@@ -20332,7 +20332,7 @@
       </p:pic>
       <p:sp>
         <p:nvSpPr>
-          <p:cNvPr id="1342928816" name="AutoShape 15"/>
+          <p:cNvPr id="288994587" name="AutoShape 15"/>
           <p:cNvSpPr/>
           <p:nvPr/>
         </p:nvSpPr>
@@ -20378,7 +20378,7 @@
       </p:sp>
       <p:cxnSp>
         <p:nvCxnSpPr>
-          <p:cNvPr id="1209727569" name="Connector 16"/>
+          <p:cNvPr id="1972222818" name="Connector 16"/>
           <p:cNvCxnSpPr/>
           <p:nvPr/>
         </p:nvCxnSpPr>
@@ -20410,7 +20410,7 @@
       </p:cxnSp>
       <p:sp>
         <p:nvSpPr>
-          <p:cNvPr id="1237574758" name="AutoShape 17"/>
+          <p:cNvPr id="51142480" name="AutoShape 17"/>
           <p:cNvSpPr/>
           <p:nvPr/>
         </p:nvSpPr>
@@ -20584,7 +20584,7 @@
       </p:grpSpPr>
       <p:sp>
         <p:nvSpPr>
-          <p:cNvPr id="1306068576" name="AutoShape 2"/>
+          <p:cNvPr id="285058711" name="AutoShape 2"/>
           <p:cNvSpPr/>
           <p:nvPr/>
         </p:nvSpPr>
@@ -20630,7 +20630,7 @@
       </p:sp>
       <p:sp>
         <p:nvSpPr>
-          <p:cNvPr id="359995284" name="AutoShape 3"/>
+          <p:cNvPr id="638470229" name="AutoShape 3"/>
           <p:cNvSpPr/>
           <p:nvPr/>
         </p:nvSpPr>
@@ -20672,7 +20672,7 @@
       </p:sp>
       <p:sp>
         <p:nvSpPr>
-          <p:cNvPr id="15064198" name="AutoShape 4"/>
+          <p:cNvPr id="12291160" name="AutoShape 4"/>
           <p:cNvSpPr/>
           <p:nvPr/>
         </p:nvSpPr>
@@ -20718,7 +20718,7 @@
       </p:sp>
       <p:cxnSp>
         <p:nvCxnSpPr>
-          <p:cNvPr id="1862539036" name="Connector 5"/>
+          <p:cNvPr id="1251155254" name="Connector 5"/>
           <p:cNvCxnSpPr/>
           <p:nvPr/>
         </p:nvCxnSpPr>
@@ -20750,7 +20750,7 @@
       </p:cxnSp>
       <p:pic>
         <p:nvPicPr>
-          <p:cNvPr id="1186438247" name="Picture 6"/>
+          <p:cNvPr id="482677830" name="Picture 6"/>
           <p:cNvPicPr>
             <a:picLocks noChangeAspect="1"/>
           </p:cNvPicPr>
@@ -20778,7 +20778,7 @@
       </p:pic>
       <p:sp>
         <p:nvSpPr>
-          <p:cNvPr id="476808981" name="AutoShape 7"/>
+          <p:cNvPr id="1358174039" name="AutoShape 7"/>
           <p:cNvSpPr/>
           <p:nvPr/>
         </p:nvSpPr>
@@ -20824,7 +20824,7 @@
       </p:sp>
       <p:sp>
         <p:nvSpPr>
-          <p:cNvPr id="511601780" name="AutoShape 8"/>
+          <p:cNvPr id="1672717581" name="AutoShape 8"/>
           <p:cNvSpPr/>
           <p:nvPr/>
         </p:nvSpPr>
@@ -20872,7 +20872,7 @@
       </p:sp>
       <p:pic>
         <p:nvPicPr>
-          <p:cNvPr id="1209022849" name="Picture 9"/>
+          <p:cNvPr id="1891689432" name="Picture 9"/>
           <p:cNvPicPr>
             <a:picLocks noChangeAspect="1"/>
           </p:cNvPicPr>
@@ -20900,7 +20900,7 @@
       </p:pic>
       <p:sp>
         <p:nvSpPr>
-          <p:cNvPr id="764046457" name="AutoShape 10"/>
+          <p:cNvPr id="217533674" name="AutoShape 10"/>
           <p:cNvSpPr/>
           <p:nvPr/>
         </p:nvSpPr>
@@ -20946,7 +20946,7 @@
       </p:sp>
       <p:sp>
         <p:nvSpPr>
-          <p:cNvPr id="1641099163" name="AutoShape 11"/>
+          <p:cNvPr id="1400273331" name="AutoShape 11"/>
           <p:cNvSpPr/>
           <p:nvPr/>
         </p:nvSpPr>
@@ -20994,7 +20994,7 @@
       </p:sp>
       <p:pic>
         <p:nvPicPr>
-          <p:cNvPr id="856457551" name="Picture 12"/>
+          <p:cNvPr id="1949871636" name="Picture 12"/>
           <p:cNvPicPr>
             <a:picLocks noChangeAspect="1"/>
           </p:cNvPicPr>
@@ -21016,7 +21016,7 @@
       </p:pic>
       <p:sp>
         <p:nvSpPr>
-          <p:cNvPr id="667794906" name="AutoShape 13"/>
+          <p:cNvPr id="1828319155" name="AutoShape 13"/>
           <p:cNvSpPr/>
           <p:nvPr/>
         </p:nvSpPr>
@@ -21062,7 +21062,7 @@
       </p:sp>
       <p:sp>
         <p:nvSpPr>
-          <p:cNvPr id="2083913488" name="AutoShape 14"/>
+          <p:cNvPr id="669479136" name="AutoShape 14"/>
           <p:cNvSpPr/>
           <p:nvPr/>
         </p:nvSpPr>
@@ -21110,7 +21110,7 @@
       </p:sp>
       <p:sp>
         <p:nvSpPr>
-          <p:cNvPr id="1108809789" name="AutoShape 15"/>
+          <p:cNvPr id="2044883016" name="AutoShape 15"/>
           <p:cNvSpPr/>
           <p:nvPr/>
         </p:nvSpPr>
@@ -21152,7 +21152,7 @@
       </p:sp>
       <p:sp>
         <p:nvSpPr>
-          <p:cNvPr id="1790392665" name="AutoShape 16"/>
+          <p:cNvPr id="608839959" name="AutoShape 16"/>
           <p:cNvSpPr/>
           <p:nvPr/>
         </p:nvSpPr>
@@ -21198,7 +21198,7 @@
       </p:sp>
       <p:cxnSp>
         <p:nvCxnSpPr>
-          <p:cNvPr id="1271535760" name="Connector 17"/>
+          <p:cNvPr id="1100113" name="Connector 17"/>
           <p:cNvCxnSpPr/>
           <p:nvPr/>
         </p:nvCxnSpPr>
@@ -21230,7 +21230,7 @@
       </p:cxnSp>
       <p:pic>
         <p:nvPicPr>
-          <p:cNvPr id="960433818" name="Picture 18"/>
+          <p:cNvPr id="645610525" name="Picture 18"/>
           <p:cNvPicPr>
             <a:picLocks noChangeAspect="1"/>
           </p:cNvPicPr>
@@ -21258,7 +21258,7 @@
       </p:pic>
       <p:sp>
         <p:nvSpPr>
-          <p:cNvPr id="357531827" name="AutoShape 19"/>
+          <p:cNvPr id="544690671" name="AutoShape 19"/>
           <p:cNvSpPr/>
           <p:nvPr/>
         </p:nvSpPr>
@@ -21304,7 +21304,7 @@
       </p:sp>
       <p:sp>
         <p:nvSpPr>
-          <p:cNvPr id="1541384232" name="AutoShape 20"/>
+          <p:cNvPr id="429025364" name="AutoShape 20"/>
           <p:cNvSpPr/>
           <p:nvPr/>
         </p:nvSpPr>
@@ -21352,7 +21352,7 @@
       </p:sp>
       <p:pic>
         <p:nvPicPr>
-          <p:cNvPr id="900853587" name="Picture 21"/>
+          <p:cNvPr id="447275207" name="Picture 21"/>
           <p:cNvPicPr>
             <a:picLocks noChangeAspect="1"/>
           </p:cNvPicPr>
@@ -21380,7 +21380,7 @@
       </p:pic>
       <p:sp>
         <p:nvSpPr>
-          <p:cNvPr id="534230383" name="AutoShape 22"/>
+          <p:cNvPr id="412569832" name="AutoShape 22"/>
           <p:cNvSpPr/>
           <p:nvPr/>
         </p:nvSpPr>
@@ -21426,7 +21426,7 @@
       </p:sp>
       <p:sp>
         <p:nvSpPr>
-          <p:cNvPr id="1003659883" name="AutoShape 23"/>
+          <p:cNvPr id="1473576107" name="AutoShape 23"/>
           <p:cNvSpPr/>
           <p:nvPr/>
         </p:nvSpPr>
@@ -21526,7 +21526,7 @@
       </p:grpSpPr>
       <p:sp>
         <p:nvSpPr>
-          <p:cNvPr id="2116339003" name="AutoShape 2"/>
+          <p:cNvPr id="566434030" name="AutoShape 2"/>
           <p:cNvSpPr/>
           <p:nvPr/>
         </p:nvSpPr>
@@ -21572,12 +21572,12 @@
       </p:sp>
       <p:cxnSp>
         <p:nvCxnSpPr>
-          <p:cNvPr id="1666301615" name="Connector 3"/>
+          <p:cNvPr id="1956057934" name="Connector 3"/>
           <p:cNvCxnSpPr/>
           <p:nvPr/>
         </p:nvCxnSpPr>
         <p:spPr bwMode="auto">
-          <a:xfrm rot="-42968" flipH="0" flipV="0">
+          <a:xfrm rot="-42967" flipH="0" flipV="0">
             <a:off x="762040" y="1771650"/>
             <a:ext cx="1016000" cy="12700"/>
           </a:xfrm>
@@ -21604,7 +21604,7 @@
       </p:cxnSp>
       <p:sp>
         <p:nvSpPr>
-          <p:cNvPr id="1911074252" name="AutoShape 4"/>
+          <p:cNvPr id="1140347772" name="AutoShape 4"/>
           <p:cNvSpPr/>
           <p:nvPr/>
         </p:nvSpPr>
@@ -21646,7 +21646,7 @@
       </p:sp>
       <p:pic>
         <p:nvPicPr>
-          <p:cNvPr id="1703280359" name="Picture 5"/>
+          <p:cNvPr id="1407402513" name="Picture 5"/>
           <p:cNvPicPr>
             <a:picLocks noChangeAspect="1"/>
           </p:cNvPicPr>
@@ -21674,7 +21674,7 @@
       </p:pic>
       <p:sp>
         <p:nvSpPr>
-          <p:cNvPr id="322975452" name="AutoShape 6"/>
+          <p:cNvPr id="888051605" name="AutoShape 6"/>
           <p:cNvSpPr/>
           <p:nvPr/>
         </p:nvSpPr>
@@ -21720,7 +21720,7 @@
       </p:sp>
       <p:sp>
         <p:nvSpPr>
-          <p:cNvPr id="1691518460" name="AutoShape 7"/>
+          <p:cNvPr id="2000368075" name="AutoShape 7"/>
           <p:cNvSpPr/>
           <p:nvPr/>
         </p:nvSpPr>
@@ -21768,7 +21768,7 @@
       </p:sp>
       <p:sp>
         <p:nvSpPr>
-          <p:cNvPr id="1817756413" name="AutoShape 8"/>
+          <p:cNvPr id="1770928845" name="AutoShape 8"/>
           <p:cNvSpPr/>
           <p:nvPr/>
         </p:nvSpPr>
@@ -21810,7 +21810,7 @@
       </p:sp>
       <p:pic>
         <p:nvPicPr>
-          <p:cNvPr id="737328241" name="Picture 9"/>
+          <p:cNvPr id="251460141" name="Picture 9"/>
           <p:cNvPicPr>
             <a:picLocks noChangeAspect="1"/>
           </p:cNvPicPr>
@@ -21838,7 +21838,7 @@
       </p:pic>
       <p:sp>
         <p:nvSpPr>
-          <p:cNvPr id="1966613214" name="AutoShape 10"/>
+          <p:cNvPr id="90837240" name="AutoShape 10"/>
           <p:cNvSpPr/>
           <p:nvPr/>
         </p:nvSpPr>
@@ -21884,7 +21884,7 @@
       </p:sp>
       <p:sp>
         <p:nvSpPr>
-          <p:cNvPr id="1387769162" name="AutoShape 11"/>
+          <p:cNvPr id="417117292" name="AutoShape 11"/>
           <p:cNvSpPr/>
           <p:nvPr/>
         </p:nvSpPr>
@@ -21932,7 +21932,7 @@
       </p:sp>
       <p:sp>
         <p:nvSpPr>
-          <p:cNvPr id="2054414379" name="AutoShape 12"/>
+          <p:cNvPr id="938037317" name="AutoShape 12"/>
           <p:cNvSpPr/>
           <p:nvPr/>
         </p:nvSpPr>
@@ -21974,7 +21974,7 @@
       </p:sp>
       <p:pic>
         <p:nvPicPr>
-          <p:cNvPr id="1798402739" name="Picture 13"/>
+          <p:cNvPr id="2069643300" name="Picture 13"/>
           <p:cNvPicPr>
             <a:picLocks noChangeAspect="1"/>
           </p:cNvPicPr>
@@ -22002,7 +22002,7 @@
       </p:pic>
       <p:sp>
         <p:nvSpPr>
-          <p:cNvPr id="1283701560" name="AutoShape 14"/>
+          <p:cNvPr id="838383895" name="AutoShape 14"/>
           <p:cNvSpPr/>
           <p:nvPr/>
         </p:nvSpPr>
@@ -22048,7 +22048,7 @@
       </p:sp>
       <p:sp>
         <p:nvSpPr>
-          <p:cNvPr id="861284718" name="AutoShape 15"/>
+          <p:cNvPr id="493194475" name="AutoShape 15"/>
           <p:cNvSpPr/>
           <p:nvPr/>
         </p:nvSpPr>

--- a/public/data/集团战略发展规划演示文稿模板.pptx
+++ b/public/data/集团战略发展规划演示文稿模板.pptx
@@ -269,7 +269,7 @@
       </p:grpSpPr>
       <p:sp>
         <p:nvSpPr>
-          <p:cNvPr id="1653851305" name="Header Placeholder 1"/>
+          <p:cNvPr id="1149439147" name="Header Placeholder 1"/>
           <p:cNvSpPr>
             <a:spLocks noGrp="1"/>
           </p:cNvSpPr>
@@ -303,7 +303,7 @@
       </p:sp>
       <p:sp>
         <p:nvSpPr>
-          <p:cNvPr id="1470523746" name="Date Placeholder 2"/>
+          <p:cNvPr id="180973606" name="Date Placeholder 2"/>
           <p:cNvSpPr>
             <a:spLocks noGrp="1"/>
           </p:cNvSpPr>
@@ -341,7 +341,7 @@
       </p:sp>
       <p:sp>
         <p:nvSpPr>
-          <p:cNvPr id="122206456" name="Slide Image Placeholder 3"/>
+          <p:cNvPr id="853007466" name="Slide Image Placeholder 3"/>
           <p:cNvSpPr>
             <a:spLocks noChangeAspect="1" noGrp="1" noRot="1"/>
           </p:cNvSpPr>
@@ -377,7 +377,7 @@
       </p:sp>
       <p:sp>
         <p:nvSpPr>
-          <p:cNvPr id="546777765" name="Notes Placeholder 4"/>
+          <p:cNvPr id="136952061" name="Notes Placeholder 4"/>
           <p:cNvSpPr>
             <a:spLocks noGrp="1"/>
           </p:cNvSpPr>
@@ -451,7 +451,7 @@
       </p:sp>
       <p:sp>
         <p:nvSpPr>
-          <p:cNvPr id="766959469" name="Footer Placeholder 5"/>
+          <p:cNvPr id="635967224" name="Footer Placeholder 5"/>
           <p:cNvSpPr>
             <a:spLocks noGrp="1"/>
           </p:cNvSpPr>
@@ -485,7 +485,7 @@
       </p:sp>
       <p:sp>
         <p:nvSpPr>
-          <p:cNvPr id="2126535118" name="Slide Number Placeholder 6"/>
+          <p:cNvPr id="1019220173" name="Slide Number Placeholder 6"/>
           <p:cNvSpPr>
             <a:spLocks noGrp="1"/>
           </p:cNvSpPr>
@@ -638,7 +638,7 @@
       </p:grpSpPr>
       <p:sp>
         <p:nvSpPr>
-          <p:cNvPr id="85077897" name="Header Placeholder 1"/>
+          <p:cNvPr id="460581150" name="Header Placeholder 1"/>
           <p:cNvSpPr>
             <a:spLocks noGrp="1"/>
           </p:cNvSpPr>
@@ -672,7 +672,7 @@
       </p:sp>
       <p:sp>
         <p:nvSpPr>
-          <p:cNvPr id="60680150" name="Date Placeholder 2"/>
+          <p:cNvPr id="479414853" name="Date Placeholder 2"/>
           <p:cNvSpPr>
             <a:spLocks noGrp="1"/>
           </p:cNvSpPr>
@@ -710,7 +710,7 @@
       </p:sp>
       <p:sp>
         <p:nvSpPr>
-          <p:cNvPr id="1334115084" name="Slide Image Placeholder 3"/>
+          <p:cNvPr id="500865557" name="Slide Image Placeholder 3"/>
           <p:cNvSpPr>
             <a:spLocks noChangeAspect="1" noGrp="1" noRot="1"/>
           </p:cNvSpPr>
@@ -746,7 +746,7 @@
       </p:sp>
       <p:sp>
         <p:nvSpPr>
-          <p:cNvPr id="154539720" name="Notes Placeholder 4"/>
+          <p:cNvPr id="730283284" name="Notes Placeholder 4"/>
           <p:cNvSpPr>
             <a:spLocks noGrp="1"/>
           </p:cNvSpPr>
@@ -791,7 +791,7 @@
       </p:sp>
       <p:sp>
         <p:nvSpPr>
-          <p:cNvPr id="559953335" name="Footer Placeholder 5"/>
+          <p:cNvPr id="199214548" name="Footer Placeholder 5"/>
           <p:cNvSpPr>
             <a:spLocks noGrp="1"/>
           </p:cNvSpPr>
@@ -825,7 +825,7 @@
       </p:sp>
       <p:sp>
         <p:nvSpPr>
-          <p:cNvPr id="195107679" name="Slide Number Placeholder 6"/>
+          <p:cNvPr id="145656182" name="Slide Number Placeholder 6"/>
           <p:cNvSpPr>
             <a:spLocks noGrp="1"/>
           </p:cNvSpPr>
@@ -888,7 +888,7 @@
       </p:grpSpPr>
       <p:sp>
         <p:nvSpPr>
-          <p:cNvPr id="13867532" name="Header Placeholder 1"/>
+          <p:cNvPr id="1393132091" name="Header Placeholder 1"/>
           <p:cNvSpPr>
             <a:spLocks noGrp="1"/>
           </p:cNvSpPr>
@@ -922,7 +922,7 @@
       </p:sp>
       <p:sp>
         <p:nvSpPr>
-          <p:cNvPr id="225856532" name="Date Placeholder 2"/>
+          <p:cNvPr id="1416368166" name="Date Placeholder 2"/>
           <p:cNvSpPr>
             <a:spLocks noGrp="1"/>
           </p:cNvSpPr>
@@ -960,7 +960,7 @@
       </p:sp>
       <p:sp>
         <p:nvSpPr>
-          <p:cNvPr id="294621589" name="Slide Image Placeholder 3"/>
+          <p:cNvPr id="1627012626" name="Slide Image Placeholder 3"/>
           <p:cNvSpPr>
             <a:spLocks noChangeAspect="1" noGrp="1" noRot="1"/>
           </p:cNvSpPr>
@@ -996,7 +996,7 @@
       </p:sp>
       <p:sp>
         <p:nvSpPr>
-          <p:cNvPr id="1842158773" name="Notes Placeholder 4"/>
+          <p:cNvPr id="164570021" name="Notes Placeholder 4"/>
           <p:cNvSpPr>
             <a:spLocks noGrp="1"/>
           </p:cNvSpPr>
@@ -1041,7 +1041,7 @@
       </p:sp>
       <p:sp>
         <p:nvSpPr>
-          <p:cNvPr id="1875468018" name="Footer Placeholder 5"/>
+          <p:cNvPr id="1147505687" name="Footer Placeholder 5"/>
           <p:cNvSpPr>
             <a:spLocks noGrp="1"/>
           </p:cNvSpPr>
@@ -1075,7 +1075,7 @@
       </p:sp>
       <p:sp>
         <p:nvSpPr>
-          <p:cNvPr id="333245934" name="Slide Number Placeholder 6"/>
+          <p:cNvPr id="703951974" name="Slide Number Placeholder 6"/>
           <p:cNvSpPr>
             <a:spLocks noGrp="1"/>
           </p:cNvSpPr>
@@ -1138,7 +1138,7 @@
       </p:grpSpPr>
       <p:sp>
         <p:nvSpPr>
-          <p:cNvPr id="1990394642" name="Header Placeholder 1"/>
+          <p:cNvPr id="1433004747" name="Header Placeholder 1"/>
           <p:cNvSpPr>
             <a:spLocks noGrp="1"/>
           </p:cNvSpPr>
@@ -1172,7 +1172,7 @@
       </p:sp>
       <p:sp>
         <p:nvSpPr>
-          <p:cNvPr id="42558060" name="Date Placeholder 2"/>
+          <p:cNvPr id="1085736963" name="Date Placeholder 2"/>
           <p:cNvSpPr>
             <a:spLocks noGrp="1"/>
           </p:cNvSpPr>
@@ -1210,7 +1210,7 @@
       </p:sp>
       <p:sp>
         <p:nvSpPr>
-          <p:cNvPr id="690351431" name="Slide Image Placeholder 3"/>
+          <p:cNvPr id="1572470672" name="Slide Image Placeholder 3"/>
           <p:cNvSpPr>
             <a:spLocks noChangeAspect="1" noGrp="1" noRot="1"/>
           </p:cNvSpPr>
@@ -1246,7 +1246,7 @@
       </p:sp>
       <p:sp>
         <p:nvSpPr>
-          <p:cNvPr id="922475482" name="Notes Placeholder 4"/>
+          <p:cNvPr id="1840182465" name="Notes Placeholder 4"/>
           <p:cNvSpPr>
             <a:spLocks noGrp="1"/>
           </p:cNvSpPr>
@@ -1291,7 +1291,7 @@
       </p:sp>
       <p:sp>
         <p:nvSpPr>
-          <p:cNvPr id="674890359" name="Footer Placeholder 5"/>
+          <p:cNvPr id="470104899" name="Footer Placeholder 5"/>
           <p:cNvSpPr>
             <a:spLocks noGrp="1"/>
           </p:cNvSpPr>
@@ -1325,7 +1325,7 @@
       </p:sp>
       <p:sp>
         <p:nvSpPr>
-          <p:cNvPr id="1161164582" name="Slide Number Placeholder 6"/>
+          <p:cNvPr id="776633144" name="Slide Number Placeholder 6"/>
           <p:cNvSpPr>
             <a:spLocks noGrp="1"/>
           </p:cNvSpPr>
@@ -1388,7 +1388,7 @@
       </p:grpSpPr>
       <p:sp>
         <p:nvSpPr>
-          <p:cNvPr id="1130126297" name="Header Placeholder 1"/>
+          <p:cNvPr id="1487516518" name="Header Placeholder 1"/>
           <p:cNvSpPr>
             <a:spLocks noGrp="1"/>
           </p:cNvSpPr>
@@ -1422,7 +1422,7 @@
       </p:sp>
       <p:sp>
         <p:nvSpPr>
-          <p:cNvPr id="317039571" name="Date Placeholder 2"/>
+          <p:cNvPr id="1879954075" name="Date Placeholder 2"/>
           <p:cNvSpPr>
             <a:spLocks noGrp="1"/>
           </p:cNvSpPr>
@@ -1460,7 +1460,7 @@
       </p:sp>
       <p:sp>
         <p:nvSpPr>
-          <p:cNvPr id="1167466246" name="Slide Image Placeholder 3"/>
+          <p:cNvPr id="824006919" name="Slide Image Placeholder 3"/>
           <p:cNvSpPr>
             <a:spLocks noChangeAspect="1" noGrp="1" noRot="1"/>
           </p:cNvSpPr>
@@ -1496,7 +1496,7 @@
       </p:sp>
       <p:sp>
         <p:nvSpPr>
-          <p:cNvPr id="2144507112" name="Notes Placeholder 4"/>
+          <p:cNvPr id="1796122719" name="Notes Placeholder 4"/>
           <p:cNvSpPr>
             <a:spLocks noGrp="1"/>
           </p:cNvSpPr>
@@ -1541,7 +1541,7 @@
       </p:sp>
       <p:sp>
         <p:nvSpPr>
-          <p:cNvPr id="1502618816" name="Footer Placeholder 5"/>
+          <p:cNvPr id="32872350" name="Footer Placeholder 5"/>
           <p:cNvSpPr>
             <a:spLocks noGrp="1"/>
           </p:cNvSpPr>
@@ -1575,7 +1575,7 @@
       </p:sp>
       <p:sp>
         <p:nvSpPr>
-          <p:cNvPr id="695309069" name="Slide Number Placeholder 6"/>
+          <p:cNvPr id="497995356" name="Slide Number Placeholder 6"/>
           <p:cNvSpPr>
             <a:spLocks noGrp="1"/>
           </p:cNvSpPr>
@@ -1638,7 +1638,7 @@
       </p:grpSpPr>
       <p:sp>
         <p:nvSpPr>
-          <p:cNvPr id="1573844254" name="Header Placeholder 1"/>
+          <p:cNvPr id="1278952162" name="Header Placeholder 1"/>
           <p:cNvSpPr>
             <a:spLocks noGrp="1"/>
           </p:cNvSpPr>
@@ -1672,7 +1672,7 @@
       </p:sp>
       <p:sp>
         <p:nvSpPr>
-          <p:cNvPr id="1826010950" name="Date Placeholder 2"/>
+          <p:cNvPr id="460119447" name="Date Placeholder 2"/>
           <p:cNvSpPr>
             <a:spLocks noGrp="1"/>
           </p:cNvSpPr>
@@ -1710,7 +1710,7 @@
       </p:sp>
       <p:sp>
         <p:nvSpPr>
-          <p:cNvPr id="1696142782" name="Slide Image Placeholder 3"/>
+          <p:cNvPr id="1385301450" name="Slide Image Placeholder 3"/>
           <p:cNvSpPr>
             <a:spLocks noChangeAspect="1" noGrp="1" noRot="1"/>
           </p:cNvSpPr>
@@ -1746,7 +1746,7 @@
       </p:sp>
       <p:sp>
         <p:nvSpPr>
-          <p:cNvPr id="17127421" name="Notes Placeholder 4"/>
+          <p:cNvPr id="1627736674" name="Notes Placeholder 4"/>
           <p:cNvSpPr>
             <a:spLocks noGrp="1"/>
           </p:cNvSpPr>
@@ -1791,7 +1791,7 @@
       </p:sp>
       <p:sp>
         <p:nvSpPr>
-          <p:cNvPr id="1515117117" name="Footer Placeholder 5"/>
+          <p:cNvPr id="12832648" name="Footer Placeholder 5"/>
           <p:cNvSpPr>
             <a:spLocks noGrp="1"/>
           </p:cNvSpPr>
@@ -1825,7 +1825,7 @@
       </p:sp>
       <p:sp>
         <p:nvSpPr>
-          <p:cNvPr id="1761458822" name="Slide Number Placeholder 6"/>
+          <p:cNvPr id="471344622" name="Slide Number Placeholder 6"/>
           <p:cNvSpPr>
             <a:spLocks noGrp="1"/>
           </p:cNvSpPr>
@@ -1888,7 +1888,7 @@
       </p:grpSpPr>
       <p:sp>
         <p:nvSpPr>
-          <p:cNvPr id="1118445050" name="Header Placeholder 1"/>
+          <p:cNvPr id="1524539001" name="Header Placeholder 1"/>
           <p:cNvSpPr>
             <a:spLocks noGrp="1"/>
           </p:cNvSpPr>
@@ -1922,7 +1922,7 @@
       </p:sp>
       <p:sp>
         <p:nvSpPr>
-          <p:cNvPr id="1020001852" name="Date Placeholder 2"/>
+          <p:cNvPr id="1565579469" name="Date Placeholder 2"/>
           <p:cNvSpPr>
             <a:spLocks noGrp="1"/>
           </p:cNvSpPr>
@@ -1960,7 +1960,7 @@
       </p:sp>
       <p:sp>
         <p:nvSpPr>
-          <p:cNvPr id="260627670" name="Slide Image Placeholder 3"/>
+          <p:cNvPr id="463310897" name="Slide Image Placeholder 3"/>
           <p:cNvSpPr>
             <a:spLocks noChangeAspect="1" noGrp="1" noRot="1"/>
           </p:cNvSpPr>
@@ -1996,7 +1996,7 @@
       </p:sp>
       <p:sp>
         <p:nvSpPr>
-          <p:cNvPr id="1051468206" name="Notes Placeholder 4"/>
+          <p:cNvPr id="937876384" name="Notes Placeholder 4"/>
           <p:cNvSpPr>
             <a:spLocks noGrp="1"/>
           </p:cNvSpPr>
@@ -2041,7 +2041,7 @@
       </p:sp>
       <p:sp>
         <p:nvSpPr>
-          <p:cNvPr id="396456728" name="Footer Placeholder 5"/>
+          <p:cNvPr id="2030954110" name="Footer Placeholder 5"/>
           <p:cNvSpPr>
             <a:spLocks noGrp="1"/>
           </p:cNvSpPr>
@@ -2075,7 +2075,7 @@
       </p:sp>
       <p:sp>
         <p:nvSpPr>
-          <p:cNvPr id="1604457100" name="Slide Number Placeholder 6"/>
+          <p:cNvPr id="361443918" name="Slide Number Placeholder 6"/>
           <p:cNvSpPr>
             <a:spLocks noGrp="1"/>
           </p:cNvSpPr>
@@ -2138,7 +2138,7 @@
       </p:grpSpPr>
       <p:sp>
         <p:nvSpPr>
-          <p:cNvPr id="1969070203" name="Header Placeholder 1"/>
+          <p:cNvPr id="1749234973" name="Header Placeholder 1"/>
           <p:cNvSpPr>
             <a:spLocks noGrp="1"/>
           </p:cNvSpPr>
@@ -2172,7 +2172,7 @@
       </p:sp>
       <p:sp>
         <p:nvSpPr>
-          <p:cNvPr id="2052011483" name="Date Placeholder 2"/>
+          <p:cNvPr id="793705404" name="Date Placeholder 2"/>
           <p:cNvSpPr>
             <a:spLocks noGrp="1"/>
           </p:cNvSpPr>
@@ -2210,7 +2210,7 @@
       </p:sp>
       <p:sp>
         <p:nvSpPr>
-          <p:cNvPr id="1970984919" name="Slide Image Placeholder 3"/>
+          <p:cNvPr id="1815538380" name="Slide Image Placeholder 3"/>
           <p:cNvSpPr>
             <a:spLocks noChangeAspect="1" noGrp="1" noRot="1"/>
           </p:cNvSpPr>
@@ -2246,7 +2246,7 @@
       </p:sp>
       <p:sp>
         <p:nvSpPr>
-          <p:cNvPr id="1600287441" name="Notes Placeholder 4"/>
+          <p:cNvPr id="1878366924" name="Notes Placeholder 4"/>
           <p:cNvSpPr>
             <a:spLocks noGrp="1"/>
           </p:cNvSpPr>
@@ -2291,7 +2291,7 @@
       </p:sp>
       <p:sp>
         <p:nvSpPr>
-          <p:cNvPr id="1790831262" name="Footer Placeholder 5"/>
+          <p:cNvPr id="1359159205" name="Footer Placeholder 5"/>
           <p:cNvSpPr>
             <a:spLocks noGrp="1"/>
           </p:cNvSpPr>
@@ -2325,7 +2325,7 @@
       </p:sp>
       <p:sp>
         <p:nvSpPr>
-          <p:cNvPr id="871367889" name="Slide Number Placeholder 6"/>
+          <p:cNvPr id="1869907578" name="Slide Number Placeholder 6"/>
           <p:cNvSpPr>
             <a:spLocks noGrp="1"/>
           </p:cNvSpPr>
@@ -2388,7 +2388,7 @@
       </p:grpSpPr>
       <p:sp>
         <p:nvSpPr>
-          <p:cNvPr id="555681632" name="Header Placeholder 1"/>
+          <p:cNvPr id="1646540692" name="Header Placeholder 1"/>
           <p:cNvSpPr>
             <a:spLocks noGrp="1"/>
           </p:cNvSpPr>
@@ -2422,7 +2422,7 @@
       </p:sp>
       <p:sp>
         <p:nvSpPr>
-          <p:cNvPr id="537897657" name="Date Placeholder 2"/>
+          <p:cNvPr id="1194614241" name="Date Placeholder 2"/>
           <p:cNvSpPr>
             <a:spLocks noGrp="1"/>
           </p:cNvSpPr>
@@ -2460,7 +2460,7 @@
       </p:sp>
       <p:sp>
         <p:nvSpPr>
-          <p:cNvPr id="677395995" name="Slide Image Placeholder 3"/>
+          <p:cNvPr id="1970571224" name="Slide Image Placeholder 3"/>
           <p:cNvSpPr>
             <a:spLocks noChangeAspect="1" noGrp="1" noRot="1"/>
           </p:cNvSpPr>
@@ -2496,7 +2496,7 @@
       </p:sp>
       <p:sp>
         <p:nvSpPr>
-          <p:cNvPr id="1108718632" name="Notes Placeholder 4"/>
+          <p:cNvPr id="156823251" name="Notes Placeholder 4"/>
           <p:cNvSpPr>
             <a:spLocks noGrp="1"/>
           </p:cNvSpPr>
@@ -2541,7 +2541,7 @@
       </p:sp>
       <p:sp>
         <p:nvSpPr>
-          <p:cNvPr id="1719708187" name="Footer Placeholder 5"/>
+          <p:cNvPr id="584319330" name="Footer Placeholder 5"/>
           <p:cNvSpPr>
             <a:spLocks noGrp="1"/>
           </p:cNvSpPr>
@@ -2575,7 +2575,7 @@
       </p:sp>
       <p:sp>
         <p:nvSpPr>
-          <p:cNvPr id="704836917" name="Slide Number Placeholder 6"/>
+          <p:cNvPr id="778986158" name="Slide Number Placeholder 6"/>
           <p:cNvSpPr>
             <a:spLocks noGrp="1"/>
           </p:cNvSpPr>
@@ -2638,7 +2638,7 @@
       </p:grpSpPr>
       <p:sp>
         <p:nvSpPr>
-          <p:cNvPr id="2147422273" name="Header Placeholder 1"/>
+          <p:cNvPr id="1911378907" name="Header Placeholder 1"/>
           <p:cNvSpPr>
             <a:spLocks noGrp="1"/>
           </p:cNvSpPr>
@@ -2672,7 +2672,7 @@
       </p:sp>
       <p:sp>
         <p:nvSpPr>
-          <p:cNvPr id="1768552675" name="Date Placeholder 2"/>
+          <p:cNvPr id="369495758" name="Date Placeholder 2"/>
           <p:cNvSpPr>
             <a:spLocks noGrp="1"/>
           </p:cNvSpPr>
@@ -2710,7 +2710,7 @@
       </p:sp>
       <p:sp>
         <p:nvSpPr>
-          <p:cNvPr id="333682306" name="Slide Image Placeholder 3"/>
+          <p:cNvPr id="1780202345" name="Slide Image Placeholder 3"/>
           <p:cNvSpPr>
             <a:spLocks noChangeAspect="1" noGrp="1" noRot="1"/>
           </p:cNvSpPr>
@@ -2746,7 +2746,7 @@
       </p:sp>
       <p:sp>
         <p:nvSpPr>
-          <p:cNvPr id="1736514789" name="Notes Placeholder 4"/>
+          <p:cNvPr id="1641683717" name="Notes Placeholder 4"/>
           <p:cNvSpPr>
             <a:spLocks noGrp="1"/>
           </p:cNvSpPr>
@@ -2791,7 +2791,7 @@
       </p:sp>
       <p:sp>
         <p:nvSpPr>
-          <p:cNvPr id="1021175880" name="Footer Placeholder 5"/>
+          <p:cNvPr id="1385421581" name="Footer Placeholder 5"/>
           <p:cNvSpPr>
             <a:spLocks noGrp="1"/>
           </p:cNvSpPr>
@@ -2825,7 +2825,7 @@
       </p:sp>
       <p:sp>
         <p:nvSpPr>
-          <p:cNvPr id="1490097831" name="Slide Number Placeholder 6"/>
+          <p:cNvPr id="1210727665" name="Slide Number Placeholder 6"/>
           <p:cNvSpPr>
             <a:spLocks noGrp="1"/>
           </p:cNvSpPr>
@@ -2888,7 +2888,7 @@
       </p:grpSpPr>
       <p:sp>
         <p:nvSpPr>
-          <p:cNvPr id="2012497106" name="Header Placeholder 1"/>
+          <p:cNvPr id="2030162506" name="Header Placeholder 1"/>
           <p:cNvSpPr>
             <a:spLocks noGrp="1"/>
           </p:cNvSpPr>
@@ -2922,7 +2922,7 @@
       </p:sp>
       <p:sp>
         <p:nvSpPr>
-          <p:cNvPr id="2013043065" name="Date Placeholder 2"/>
+          <p:cNvPr id="612713268" name="Date Placeholder 2"/>
           <p:cNvSpPr>
             <a:spLocks noGrp="1"/>
           </p:cNvSpPr>
@@ -2960,7 +2960,7 @@
       </p:sp>
       <p:sp>
         <p:nvSpPr>
-          <p:cNvPr id="1235325096" name="Slide Image Placeholder 3"/>
+          <p:cNvPr id="247269857" name="Slide Image Placeholder 3"/>
           <p:cNvSpPr>
             <a:spLocks noChangeAspect="1" noGrp="1" noRot="1"/>
           </p:cNvSpPr>
@@ -2996,7 +2996,7 @@
       </p:sp>
       <p:sp>
         <p:nvSpPr>
-          <p:cNvPr id="73744278" name="Notes Placeholder 4"/>
+          <p:cNvPr id="1002754696" name="Notes Placeholder 4"/>
           <p:cNvSpPr>
             <a:spLocks noGrp="1"/>
           </p:cNvSpPr>
@@ -3041,7 +3041,7 @@
       </p:sp>
       <p:sp>
         <p:nvSpPr>
-          <p:cNvPr id="457822349" name="Footer Placeholder 5"/>
+          <p:cNvPr id="1766159310" name="Footer Placeholder 5"/>
           <p:cNvSpPr>
             <a:spLocks noGrp="1"/>
           </p:cNvSpPr>
@@ -3075,7 +3075,7 @@
       </p:sp>
       <p:sp>
         <p:nvSpPr>
-          <p:cNvPr id="1046714293" name="Slide Number Placeholder 6"/>
+          <p:cNvPr id="1572054268" name="Slide Number Placeholder 6"/>
           <p:cNvSpPr>
             <a:spLocks noGrp="1"/>
           </p:cNvSpPr>
@@ -3138,7 +3138,7 @@
       </p:grpSpPr>
       <p:sp>
         <p:nvSpPr>
-          <p:cNvPr id="176092275" name="Shape 30"/>
+          <p:cNvPr id="1498140760" name="Shape 30"/>
           <p:cNvSpPr txBox="1"/>
           <p:nvPr>
             <p:ph type="ctrTitle"/>
@@ -3279,7 +3279,7 @@
       </p:sp>
       <p:sp>
         <p:nvSpPr>
-          <p:cNvPr id="1468820100" name="Shape 31"/>
+          <p:cNvPr id="405884410" name="Shape 31"/>
           <p:cNvSpPr txBox="1"/>
           <p:nvPr>
             <p:ph type="subTitle" idx="1"/>
@@ -3467,7 +3467,7 @@
       </p:sp>
       <p:sp>
         <p:nvSpPr>
-          <p:cNvPr id="364048996" name="Shape 32"/>
+          <p:cNvPr id="31249739" name="Shape 32"/>
           <p:cNvSpPr txBox="1"/>
           <p:nvPr>
             <p:ph type="dt" idx="10"/>
@@ -3601,7 +3601,7 @@
       </p:sp>
       <p:sp>
         <p:nvSpPr>
-          <p:cNvPr id="1973205274" name="Shape 33"/>
+          <p:cNvPr id="236833728" name="Shape 33"/>
           <p:cNvSpPr txBox="1"/>
           <p:nvPr>
             <p:ph type="ftr" idx="11"/>
@@ -3735,7 +3735,7 @@
       </p:sp>
       <p:sp>
         <p:nvSpPr>
-          <p:cNvPr id="1293907795" name="Shape 34"/>
+          <p:cNvPr id="1483058361" name="Shape 34"/>
           <p:cNvSpPr txBox="1"/>
           <p:nvPr>
             <p:ph type="sldNum" idx="12"/>
@@ -3869,7 +3869,7 @@
       </p:grpSpPr>
       <p:sp>
         <p:nvSpPr>
-          <p:cNvPr id="2130015561" name="Shape 49"/>
+          <p:cNvPr id="695055350" name="Shape 49"/>
           <p:cNvSpPr txBox="1"/>
           <p:nvPr>
             <p:ph type="title"/>
@@ -4009,7 +4009,7 @@
       </p:sp>
       <p:sp>
         <p:nvSpPr>
-          <p:cNvPr id="2146808486" name="Shape 50"/>
+          <p:cNvPr id="1639751130" name="Shape 50"/>
           <p:cNvSpPr txBox="1"/>
           <p:nvPr>
             <p:ph type="body" idx="1"/>
@@ -4197,7 +4197,7 @@
       </p:sp>
       <p:sp>
         <p:nvSpPr>
-          <p:cNvPr id="827494578" name="Shape 51"/>
+          <p:cNvPr id="97829388" name="Shape 51"/>
           <p:cNvSpPr txBox="1"/>
           <p:nvPr>
             <p:ph type="dt" idx="10"/>
@@ -4331,7 +4331,7 @@
       </p:sp>
       <p:sp>
         <p:nvSpPr>
-          <p:cNvPr id="1646353566" name="Shape 52"/>
+          <p:cNvPr id="1296043686" name="Shape 52"/>
           <p:cNvSpPr txBox="1"/>
           <p:nvPr>
             <p:ph type="ftr" idx="11"/>
@@ -4465,7 +4465,7 @@
       </p:sp>
       <p:sp>
         <p:nvSpPr>
-          <p:cNvPr id="529396503" name="Shape 53"/>
+          <p:cNvPr id="733201052" name="Shape 53"/>
           <p:cNvSpPr txBox="1"/>
           <p:nvPr>
             <p:ph type="sldNum" idx="12"/>
@@ -4599,7 +4599,7 @@
       </p:grpSpPr>
       <p:sp>
         <p:nvSpPr>
-          <p:cNvPr id="163753071" name="Shape 15"/>
+          <p:cNvPr id="1759538170" name="Shape 15"/>
           <p:cNvSpPr txBox="1"/>
           <p:nvPr>
             <p:ph type="title"/>
@@ -4739,7 +4739,7 @@
       </p:sp>
       <p:sp>
         <p:nvSpPr>
-          <p:cNvPr id="1261978012" name="Shape 16"/>
+          <p:cNvPr id="493550489" name="Shape 16"/>
           <p:cNvSpPr txBox="1"/>
           <p:nvPr>
             <p:ph type="body" idx="1"/>
@@ -4927,7 +4927,7 @@
       </p:sp>
       <p:sp>
         <p:nvSpPr>
-          <p:cNvPr id="1525823542" name="Shape 17"/>
+          <p:cNvPr id="583957752" name="Shape 17"/>
           <p:cNvSpPr txBox="1"/>
           <p:nvPr>
             <p:ph type="dt" idx="10"/>
@@ -5061,7 +5061,7 @@
       </p:sp>
       <p:sp>
         <p:nvSpPr>
-          <p:cNvPr id="1953102051" name="Shape 18"/>
+          <p:cNvPr id="406959607" name="Shape 18"/>
           <p:cNvSpPr txBox="1"/>
           <p:nvPr>
             <p:ph type="ftr" idx="11"/>
@@ -5195,7 +5195,7 @@
       </p:sp>
       <p:sp>
         <p:nvSpPr>
-          <p:cNvPr id="1498940686" name="Shape 19"/>
+          <p:cNvPr id="792502948" name="Shape 19"/>
           <p:cNvSpPr txBox="1"/>
           <p:nvPr>
             <p:ph type="sldNum" idx="12"/>
@@ -5354,7 +5354,7 @@
       </p:grpSpPr>
       <p:sp>
         <p:nvSpPr>
-          <p:cNvPr id="390603217" name="Shape 54"/>
+          <p:cNvPr id="699261024" name="Shape 54"/>
           <p:cNvSpPr txBox="1"/>
           <p:nvPr>
             <p:ph type="title"/>
@@ -5494,7 +5494,7 @@
       </p:sp>
       <p:sp>
         <p:nvSpPr>
-          <p:cNvPr id="1445559585" name="Shape 55"/>
+          <p:cNvPr id="899133899" name="Shape 55"/>
           <p:cNvSpPr txBox="1"/>
           <p:nvPr>
             <p:ph type="body" idx="1"/>
@@ -5682,7 +5682,7 @@
       </p:sp>
       <p:sp>
         <p:nvSpPr>
-          <p:cNvPr id="883951301" name="Shape 56"/>
+          <p:cNvPr id="1608759189" name="Shape 56"/>
           <p:cNvSpPr txBox="1"/>
           <p:nvPr>
             <p:ph type="dt" idx="10"/>
@@ -5816,7 +5816,7 @@
       </p:sp>
       <p:sp>
         <p:nvSpPr>
-          <p:cNvPr id="1688039222" name="Shape 57"/>
+          <p:cNvPr id="291114453" name="Shape 57"/>
           <p:cNvSpPr txBox="1"/>
           <p:nvPr>
             <p:ph type="ftr" idx="11"/>
@@ -5950,7 +5950,7 @@
       </p:sp>
       <p:sp>
         <p:nvSpPr>
-          <p:cNvPr id="730243571" name="Shape 58"/>
+          <p:cNvPr id="548676038" name="Shape 58"/>
           <p:cNvSpPr txBox="1"/>
           <p:nvPr>
             <p:ph type="sldNum" idx="12"/>
@@ -6084,7 +6084,7 @@
       </p:grpSpPr>
       <p:sp>
         <p:nvSpPr>
-          <p:cNvPr id="1401454317" name="Shape 59"/>
+          <p:cNvPr id="1141830453" name="Shape 59"/>
           <p:cNvSpPr txBox="1"/>
           <p:nvPr>
             <p:ph type="title"/>
@@ -6225,7 +6225,7 @@
       </p:sp>
       <p:sp>
         <p:nvSpPr>
-          <p:cNvPr id="432667421" name="Shape 60"/>
+          <p:cNvPr id="790529711" name="Shape 60"/>
           <p:cNvSpPr txBox="1"/>
           <p:nvPr>
             <p:ph type="body" idx="1"/>
@@ -6449,7 +6449,7 @@
       </p:sp>
       <p:sp>
         <p:nvSpPr>
-          <p:cNvPr id="1082334708" name="Shape 61"/>
+          <p:cNvPr id="636407171" name="Shape 61"/>
           <p:cNvSpPr txBox="1"/>
           <p:nvPr>
             <p:ph type="dt" idx="10"/>
@@ -6583,7 +6583,7 @@
       </p:sp>
       <p:sp>
         <p:nvSpPr>
-          <p:cNvPr id="1506411862" name="Shape 62"/>
+          <p:cNvPr id="1437299191" name="Shape 62"/>
           <p:cNvSpPr txBox="1"/>
           <p:nvPr>
             <p:ph type="ftr" idx="11"/>
@@ -6717,7 +6717,7 @@
       </p:sp>
       <p:sp>
         <p:nvSpPr>
-          <p:cNvPr id="790692746" name="Shape 63"/>
+          <p:cNvPr id="1915862979" name="Shape 63"/>
           <p:cNvSpPr txBox="1"/>
           <p:nvPr>
             <p:ph type="sldNum" idx="12"/>
@@ -6851,7 +6851,7 @@
       </p:grpSpPr>
       <p:sp>
         <p:nvSpPr>
-          <p:cNvPr id="2139939723" name="Shape 9"/>
+          <p:cNvPr id="1248862724" name="Shape 9"/>
           <p:cNvSpPr txBox="1"/>
           <p:nvPr>
             <p:ph type="title"/>
@@ -6991,7 +6991,7 @@
       </p:sp>
       <p:sp>
         <p:nvSpPr>
-          <p:cNvPr id="1557631034" name="Shape 10"/>
+          <p:cNvPr id="1549668201" name="Shape 10"/>
           <p:cNvSpPr txBox="1"/>
           <p:nvPr>
             <p:ph type="body" idx="1"/>
@@ -7179,7 +7179,7 @@
       </p:sp>
       <p:sp>
         <p:nvSpPr>
-          <p:cNvPr id="576643960" name="Shape 11"/>
+          <p:cNvPr id="663046389" name="Shape 11"/>
           <p:cNvSpPr txBox="1"/>
           <p:nvPr>
             <p:ph type="body" idx="2"/>
@@ -7367,7 +7367,7 @@
       </p:sp>
       <p:sp>
         <p:nvSpPr>
-          <p:cNvPr id="746840724" name="Shape 12"/>
+          <p:cNvPr id="523922879" name="Shape 12"/>
           <p:cNvSpPr txBox="1"/>
           <p:nvPr>
             <p:ph type="dt" idx="10"/>
@@ -7501,7 +7501,7 @@
       </p:sp>
       <p:sp>
         <p:nvSpPr>
-          <p:cNvPr id="1048936523" name="Shape 13"/>
+          <p:cNvPr id="1807210788" name="Shape 13"/>
           <p:cNvSpPr txBox="1"/>
           <p:nvPr>
             <p:ph type="ftr" idx="11"/>
@@ -7635,7 +7635,7 @@
       </p:sp>
       <p:sp>
         <p:nvSpPr>
-          <p:cNvPr id="305287625" name="Shape 14"/>
+          <p:cNvPr id="1211812072" name="Shape 14"/>
           <p:cNvSpPr txBox="1"/>
           <p:nvPr>
             <p:ph type="sldNum" idx="12"/>
@@ -7769,7 +7769,7 @@
       </p:grpSpPr>
       <p:sp>
         <p:nvSpPr>
-          <p:cNvPr id="1918615822" name="Shape 35"/>
+          <p:cNvPr id="1144266884" name="Shape 35"/>
           <p:cNvSpPr txBox="1"/>
           <p:nvPr>
             <p:ph type="title"/>
@@ -7909,7 +7909,7 @@
       </p:sp>
       <p:sp>
         <p:nvSpPr>
-          <p:cNvPr id="920559409" name="Shape 36"/>
+          <p:cNvPr id="1306972329" name="Shape 36"/>
           <p:cNvSpPr txBox="1"/>
           <p:nvPr>
             <p:ph type="body" idx="1"/>
@@ -8097,7 +8097,7 @@
       </p:sp>
       <p:sp>
         <p:nvSpPr>
-          <p:cNvPr id="1850977403" name="Shape 37"/>
+          <p:cNvPr id="1389229377" name="Shape 37"/>
           <p:cNvSpPr txBox="1"/>
           <p:nvPr>
             <p:ph type="body" idx="2"/>
@@ -8285,7 +8285,7 @@
       </p:sp>
       <p:sp>
         <p:nvSpPr>
-          <p:cNvPr id="559244052" name="Shape 38"/>
+          <p:cNvPr id="920553782" name="Shape 38"/>
           <p:cNvSpPr txBox="1"/>
           <p:nvPr>
             <p:ph type="body" idx="3"/>
@@ -8473,7 +8473,7 @@
       </p:sp>
       <p:sp>
         <p:nvSpPr>
-          <p:cNvPr id="484858483" name="Shape 39"/>
+          <p:cNvPr id="2028991248" name="Shape 39"/>
           <p:cNvSpPr txBox="1"/>
           <p:nvPr>
             <p:ph type="body" idx="4"/>
@@ -8661,7 +8661,7 @@
       </p:sp>
       <p:sp>
         <p:nvSpPr>
-          <p:cNvPr id="1251998900" name="Shape 40"/>
+          <p:cNvPr id="2102409391" name="Shape 40"/>
           <p:cNvSpPr txBox="1"/>
           <p:nvPr>
             <p:ph type="dt" idx="10"/>
@@ -8795,7 +8795,7 @@
       </p:sp>
       <p:sp>
         <p:nvSpPr>
-          <p:cNvPr id="1493461248" name="Shape 41"/>
+          <p:cNvPr id="365923017" name="Shape 41"/>
           <p:cNvSpPr txBox="1"/>
           <p:nvPr>
             <p:ph type="ftr" idx="11"/>
@@ -8929,7 +8929,7 @@
       </p:sp>
       <p:sp>
         <p:nvSpPr>
-          <p:cNvPr id="30669961" name="Shape 42"/>
+          <p:cNvPr id="596127823" name="Shape 42"/>
           <p:cNvSpPr txBox="1"/>
           <p:nvPr>
             <p:ph type="sldNum" idx="12"/>
@@ -9063,7 +9063,7 @@
       </p:grpSpPr>
       <p:sp>
         <p:nvSpPr>
-          <p:cNvPr id="1781355371" name="Shape 20"/>
+          <p:cNvPr id="1811268026" name="Shape 20"/>
           <p:cNvSpPr txBox="1"/>
           <p:nvPr>
             <p:ph type="title"/>
@@ -9203,7 +9203,7 @@
       </p:sp>
       <p:sp>
         <p:nvSpPr>
-          <p:cNvPr id="2075328593" name="Shape 21"/>
+          <p:cNvPr id="1784030279" name="Shape 21"/>
           <p:cNvSpPr txBox="1"/>
           <p:nvPr>
             <p:ph type="dt" idx="10"/>
@@ -9337,7 +9337,7 @@
       </p:sp>
       <p:sp>
         <p:nvSpPr>
-          <p:cNvPr id="2067168846" name="Shape 22"/>
+          <p:cNvPr id="575093041" name="Shape 22"/>
           <p:cNvSpPr txBox="1"/>
           <p:nvPr>
             <p:ph type="ftr" idx="11"/>
@@ -9471,7 +9471,7 @@
       </p:sp>
       <p:sp>
         <p:nvSpPr>
-          <p:cNvPr id="393149934" name="Shape 23"/>
+          <p:cNvPr id="426714332" name="Shape 23"/>
           <p:cNvSpPr txBox="1"/>
           <p:nvPr>
             <p:ph type="sldNum" idx="12"/>
@@ -9605,7 +9605,7 @@
       </p:grpSpPr>
       <p:sp>
         <p:nvSpPr>
-          <p:cNvPr id="1018788399" name="Shape 6"/>
+          <p:cNvPr id="1975902294" name="Shape 6"/>
           <p:cNvSpPr txBox="1"/>
           <p:nvPr>
             <p:ph type="dt" idx="10"/>
@@ -9739,7 +9739,7 @@
       </p:sp>
       <p:sp>
         <p:nvSpPr>
-          <p:cNvPr id="446861015" name="Shape 7"/>
+          <p:cNvPr id="1795326466" name="Shape 7"/>
           <p:cNvSpPr txBox="1"/>
           <p:nvPr>
             <p:ph type="ftr" idx="11"/>
@@ -9873,7 +9873,7 @@
       </p:sp>
       <p:sp>
         <p:nvSpPr>
-          <p:cNvPr id="154839279" name="Shape 8"/>
+          <p:cNvPr id="996115691" name="Shape 8"/>
           <p:cNvSpPr txBox="1"/>
           <p:nvPr>
             <p:ph type="sldNum" idx="12"/>
@@ -10007,7 +10007,7 @@
       </p:grpSpPr>
       <p:sp>
         <p:nvSpPr>
-          <p:cNvPr id="749878561" name="Shape 43"/>
+          <p:cNvPr id="291587493" name="Shape 43"/>
           <p:cNvSpPr txBox="1"/>
           <p:nvPr>
             <p:ph type="title"/>
@@ -10148,7 +10148,7 @@
       </p:sp>
       <p:sp>
         <p:nvSpPr>
-          <p:cNvPr id="1414595521" name="Shape 44"/>
+          <p:cNvPr id="489695080" name="Shape 44"/>
           <p:cNvSpPr txBox="1"/>
           <p:nvPr>
             <p:ph type="body" idx="1"/>
@@ -10336,7 +10336,7 @@
       </p:sp>
       <p:sp>
         <p:nvSpPr>
-          <p:cNvPr id="1619711329" name="Shape 45"/>
+          <p:cNvPr id="1011448125" name="Shape 45"/>
           <p:cNvSpPr txBox="1"/>
           <p:nvPr>
             <p:ph type="body" idx="2"/>
@@ -10524,7 +10524,7 @@
       </p:sp>
       <p:sp>
         <p:nvSpPr>
-          <p:cNvPr id="674796152" name="Shape 46"/>
+          <p:cNvPr id="707515480" name="Shape 46"/>
           <p:cNvSpPr txBox="1"/>
           <p:nvPr>
             <p:ph type="dt" idx="10"/>
@@ -10658,7 +10658,7 @@
       </p:sp>
       <p:sp>
         <p:nvSpPr>
-          <p:cNvPr id="1444214245" name="Shape 47"/>
+          <p:cNvPr id="373234820" name="Shape 47"/>
           <p:cNvSpPr txBox="1"/>
           <p:nvPr>
             <p:ph type="ftr" idx="11"/>
@@ -10792,7 +10792,7 @@
       </p:sp>
       <p:sp>
         <p:nvSpPr>
-          <p:cNvPr id="620104193" name="Shape 48"/>
+          <p:cNvPr id="66025888" name="Shape 48"/>
           <p:cNvSpPr txBox="1"/>
           <p:nvPr>
             <p:ph type="sldNum" idx="12"/>
@@ -10926,7 +10926,7 @@
       </p:grpSpPr>
       <p:sp>
         <p:nvSpPr>
-          <p:cNvPr id="982634436" name="Shape 24"/>
+          <p:cNvPr id="992779042" name="Shape 24"/>
           <p:cNvSpPr txBox="1"/>
           <p:nvPr>
             <p:ph type="title"/>
@@ -11067,7 +11067,7 @@
       </p:sp>
       <p:sp>
         <p:nvSpPr>
-          <p:cNvPr id="2003497953" name="Shape 25"/>
+          <p:cNvPr id="287168431" name="Shape 25"/>
           <p:cNvSpPr/>
           <p:nvPr>
             <p:ph type="pic" idx="2"/>
@@ -11089,7 +11089,7 @@
       </p:sp>
       <p:sp>
         <p:nvSpPr>
-          <p:cNvPr id="1720913341" name="Shape 26"/>
+          <p:cNvPr id="587024500" name="Shape 26"/>
           <p:cNvSpPr txBox="1"/>
           <p:nvPr>
             <p:ph type="body" idx="1"/>
@@ -11277,7 +11277,7 @@
       </p:sp>
       <p:sp>
         <p:nvSpPr>
-          <p:cNvPr id="543227344" name="Shape 27"/>
+          <p:cNvPr id="905496249" name="Shape 27"/>
           <p:cNvSpPr txBox="1"/>
           <p:nvPr>
             <p:ph type="dt" idx="10"/>
@@ -11411,7 +11411,7 @@
       </p:sp>
       <p:sp>
         <p:nvSpPr>
-          <p:cNvPr id="126601480" name="Shape 28"/>
+          <p:cNvPr id="140189307" name="Shape 28"/>
           <p:cNvSpPr txBox="1"/>
           <p:nvPr>
             <p:ph type="ftr" idx="11"/>
@@ -11545,7 +11545,7 @@
       </p:sp>
       <p:sp>
         <p:nvSpPr>
-          <p:cNvPr id="1001166881" name="Shape 29"/>
+          <p:cNvPr id="1241945259" name="Shape 29"/>
           <p:cNvSpPr txBox="1"/>
           <p:nvPr>
             <p:ph type="sldNum" idx="12"/>
@@ -11686,7 +11686,7 @@
       </p:grpSpPr>
       <p:sp>
         <p:nvSpPr>
-          <p:cNvPr id="1629966692" name="Shape 1"/>
+          <p:cNvPr id="1183367226" name="Shape 1"/>
           <p:cNvSpPr txBox="1"/>
           <p:nvPr>
             <p:ph type="title"/>
@@ -11834,7 +11834,7 @@
       </p:sp>
       <p:sp>
         <p:nvSpPr>
-          <p:cNvPr id="767200407" name="Shape 2"/>
+          <p:cNvPr id="538849681" name="Shape 2"/>
           <p:cNvSpPr txBox="1"/>
           <p:nvPr>
             <p:ph type="body" idx="1"/>
@@ -12094,7 +12094,7 @@
       </p:sp>
       <p:sp>
         <p:nvSpPr>
-          <p:cNvPr id="1613531802" name="Shape 3"/>
+          <p:cNvPr id="868309484" name="Shape 3"/>
           <p:cNvSpPr txBox="1"/>
           <p:nvPr>
             <p:ph type="dt" idx="10"/>
@@ -12291,7 +12291,7 @@
       </p:sp>
       <p:sp>
         <p:nvSpPr>
-          <p:cNvPr id="449829296" name="Shape 4"/>
+          <p:cNvPr id="645243890" name="Shape 4"/>
           <p:cNvSpPr txBox="1"/>
           <p:nvPr>
             <p:ph type="ftr" idx="11"/>
@@ -12488,7 +12488,7 @@
       </p:sp>
       <p:sp>
         <p:nvSpPr>
-          <p:cNvPr id="2077691574" name="Shape 5"/>
+          <p:cNvPr id="531224689" name="Shape 5"/>
           <p:cNvSpPr txBox="1"/>
           <p:nvPr>
             <p:ph type="sldNum" idx="12"/>
@@ -14076,7 +14076,7 @@
       </p:grpSpPr>
       <p:pic>
         <p:nvPicPr>
-          <p:cNvPr id="767983430" name="Picture 2"/>
+          <p:cNvPr id="29271133" name="Picture 2"/>
           <p:cNvPicPr>
             <a:picLocks noChangeAspect="1"/>
           </p:cNvPicPr>
@@ -14104,7 +14104,7 @@
       </p:pic>
       <p:sp>
         <p:nvSpPr>
-          <p:cNvPr id="335442840" name="AutoShape 3"/>
+          <p:cNvPr id="1259696040" name="AutoShape 3"/>
           <p:cNvSpPr/>
           <p:nvPr/>
         </p:nvSpPr>
@@ -14142,7 +14142,7 @@
                 <a:ea typeface="Noto Sans SC"/>
                 <a:cs typeface="Noto Sans SC"/>
               </a:rPr>
-              <a:t>2026集团战略发展规划12</a:t>
+              <a:t>2026集团战略发展规划发展</a:t>
             </a:r>
             <a:endParaRPr lang="en-US" sz="1100"/>
           </a:p>
@@ -14150,7 +14150,7 @@
       </p:sp>
       <p:sp>
         <p:nvSpPr>
-          <p:cNvPr id="985874178" name="AutoShape 4"/>
+          <p:cNvPr id="799014320" name="AutoShape 4"/>
           <p:cNvSpPr/>
           <p:nvPr/>
         </p:nvSpPr>
@@ -14188,7 +14188,7 @@
       </p:sp>
       <p:sp>
         <p:nvSpPr>
-          <p:cNvPr id="1633242671" name="AutoShape 5"/>
+          <p:cNvPr id="238205008" name="AutoShape 5"/>
           <p:cNvSpPr/>
           <p:nvPr/>
         </p:nvSpPr>
@@ -14236,7 +14236,7 @@
       </p:sp>
       <p:sp>
         <p:nvSpPr>
-          <p:cNvPr id="1800988865" name="AutoShape 6"/>
+          <p:cNvPr id="1215663248" name="AutoShape 6"/>
           <p:cNvSpPr/>
           <p:nvPr/>
         </p:nvSpPr>
@@ -14274,7 +14274,7 @@
       </p:sp>
       <p:sp>
         <p:nvSpPr>
-          <p:cNvPr id="1565328856" name="AutoShape 7"/>
+          <p:cNvPr id="368209571" name="AutoShape 7"/>
           <p:cNvSpPr/>
           <p:nvPr/>
         </p:nvSpPr>
@@ -14374,7 +14374,7 @@
       </p:grpSpPr>
       <p:sp>
         <p:nvSpPr>
-          <p:cNvPr id="2073791818" name="AutoShape 2"/>
+          <p:cNvPr id="2044452953" name="AutoShape 2"/>
           <p:cNvSpPr/>
           <p:nvPr/>
         </p:nvSpPr>
@@ -14412,7 +14412,7 @@
       </p:sp>
       <p:sp>
         <p:nvSpPr>
-          <p:cNvPr id="114071724" name="AutoShape 3"/>
+          <p:cNvPr id="1076869946" name="AutoShape 3"/>
           <p:cNvSpPr/>
           <p:nvPr/>
         </p:nvSpPr>
@@ -14458,7 +14458,7 @@
       </p:sp>
       <p:sp>
         <p:nvSpPr>
-          <p:cNvPr id="1127008592" name="AutoShape 4"/>
+          <p:cNvPr id="663655041" name="AutoShape 4"/>
           <p:cNvSpPr/>
           <p:nvPr/>
         </p:nvSpPr>
@@ -14506,7 +14506,7 @@
       </p:sp>
       <p:cxnSp>
         <p:nvCxnSpPr>
-          <p:cNvPr id="1912998028" name="Connector 5"/>
+          <p:cNvPr id="1734688500" name="Connector 5"/>
           <p:cNvCxnSpPr/>
           <p:nvPr/>
         </p:nvCxnSpPr>
@@ -14538,7 +14538,7 @@
       </p:cxnSp>
       <p:pic>
         <p:nvPicPr>
-          <p:cNvPr id="445363035" name="Picture 6"/>
+          <p:cNvPr id="566751653" name="Picture 6"/>
           <p:cNvPicPr>
             <a:picLocks noChangeAspect="1"/>
           </p:cNvPicPr>
@@ -14566,7 +14566,7 @@
       </p:pic>
       <p:sp>
         <p:nvSpPr>
-          <p:cNvPr id="1055696396" name="AutoShape 7"/>
+          <p:cNvPr id="1977439293" name="AutoShape 7"/>
           <p:cNvSpPr/>
           <p:nvPr/>
         </p:nvSpPr>
@@ -14612,7 +14612,7 @@
       </p:sp>
       <p:pic>
         <p:nvPicPr>
-          <p:cNvPr id="34816201" name="Picture 8"/>
+          <p:cNvPr id="1143320113" name="Picture 8"/>
           <p:cNvPicPr>
             <a:picLocks noChangeAspect="1"/>
           </p:cNvPicPr>
@@ -14640,7 +14640,7 @@
       </p:pic>
       <p:sp>
         <p:nvSpPr>
-          <p:cNvPr id="1493935039" name="AutoShape 9"/>
+          <p:cNvPr id="1527723226" name="AutoShape 9"/>
           <p:cNvSpPr/>
           <p:nvPr/>
         </p:nvSpPr>
@@ -14688,7 +14688,7 @@
       </p:sp>
       <p:pic>
         <p:nvPicPr>
-          <p:cNvPr id="1574582585" name="Picture 10"/>
+          <p:cNvPr id="1812466617" name="Picture 10"/>
           <p:cNvPicPr>
             <a:picLocks noChangeAspect="1"/>
           </p:cNvPicPr>
@@ -14762,7 +14762,7 @@
       </p:grpSpPr>
       <p:sp>
         <p:nvSpPr>
-          <p:cNvPr id="1875411043" name="AutoShape 2"/>
+          <p:cNvPr id="1363105905" name="AutoShape 2"/>
           <p:cNvSpPr/>
           <p:nvPr/>
         </p:nvSpPr>
@@ -14808,7 +14808,7 @@
       </p:sp>
       <p:cxnSp>
         <p:nvCxnSpPr>
-          <p:cNvPr id="1730255612" name="Connector 3"/>
+          <p:cNvPr id="231123910" name="Connector 3"/>
           <p:cNvCxnSpPr/>
           <p:nvPr/>
         </p:nvCxnSpPr>
@@ -14840,7 +14840,7 @@
       </p:cxnSp>
       <p:sp>
         <p:nvSpPr>
-          <p:cNvPr id="1475802562" name="AutoShape 4"/>
+          <p:cNvPr id="2114672289" name="AutoShape 4"/>
           <p:cNvSpPr/>
           <p:nvPr/>
         </p:nvSpPr>
@@ -14882,7 +14882,7 @@
       </p:sp>
       <p:pic>
         <p:nvPicPr>
-          <p:cNvPr id="951402171" name="Picture 5"/>
+          <p:cNvPr id="141854570" name="Picture 5"/>
           <p:cNvPicPr>
             <a:picLocks noChangeAspect="1"/>
           </p:cNvPicPr>
@@ -14910,7 +14910,7 @@
       </p:pic>
       <p:sp>
         <p:nvSpPr>
-          <p:cNvPr id="1635466256" name="AutoShape 6"/>
+          <p:cNvPr id="1061387951" name="AutoShape 6"/>
           <p:cNvSpPr/>
           <p:nvPr/>
         </p:nvSpPr>
@@ -14978,7 +14978,7 @@
       </p:sp>
       <p:sp>
         <p:nvSpPr>
-          <p:cNvPr id="117666203" name="AutoShape 7"/>
+          <p:cNvPr id="12082436" name="AutoShape 7"/>
           <p:cNvSpPr/>
           <p:nvPr/>
         </p:nvSpPr>
@@ -15020,7 +15020,7 @@
       </p:sp>
       <p:pic>
         <p:nvPicPr>
-          <p:cNvPr id="1331715507" name="Picture 8"/>
+          <p:cNvPr id="322489532" name="Picture 8"/>
           <p:cNvPicPr>
             <a:picLocks noChangeAspect="1"/>
           </p:cNvPicPr>
@@ -15048,7 +15048,7 @@
       </p:pic>
       <p:sp>
         <p:nvSpPr>
-          <p:cNvPr id="695141127" name="AutoShape 9"/>
+          <p:cNvPr id="1865727683" name="AutoShape 9"/>
           <p:cNvSpPr/>
           <p:nvPr/>
         </p:nvSpPr>
@@ -15116,7 +15116,7 @@
       </p:sp>
       <p:sp>
         <p:nvSpPr>
-          <p:cNvPr id="1206493701" name="AutoShape 10"/>
+          <p:cNvPr id="1891657258" name="AutoShape 10"/>
           <p:cNvSpPr/>
           <p:nvPr/>
         </p:nvSpPr>
@@ -15158,7 +15158,7 @@
       </p:sp>
       <p:pic>
         <p:nvPicPr>
-          <p:cNvPr id="851415705" name="Picture 11"/>
+          <p:cNvPr id="676681885" name="Picture 11"/>
           <p:cNvPicPr>
             <a:picLocks noChangeAspect="1"/>
           </p:cNvPicPr>
@@ -15186,7 +15186,7 @@
       </p:pic>
       <p:sp>
         <p:nvSpPr>
-          <p:cNvPr id="1335375020" name="AutoShape 12"/>
+          <p:cNvPr id="1149100093" name="AutoShape 12"/>
           <p:cNvSpPr/>
           <p:nvPr/>
         </p:nvSpPr>
@@ -15254,7 +15254,7 @@
       </p:sp>
       <p:sp>
         <p:nvSpPr>
-          <p:cNvPr id="522255040" name="AutoShape 13"/>
+          <p:cNvPr id="378757168" name="AutoShape 13"/>
           <p:cNvSpPr/>
           <p:nvPr/>
         </p:nvSpPr>
@@ -15296,7 +15296,7 @@
       </p:sp>
       <p:pic>
         <p:nvPicPr>
-          <p:cNvPr id="1364938431" name="Picture 14"/>
+          <p:cNvPr id="986543168" name="Picture 14"/>
           <p:cNvPicPr>
             <a:picLocks noChangeAspect="1"/>
           </p:cNvPicPr>
@@ -15324,7 +15324,7 @@
       </p:pic>
       <p:sp>
         <p:nvSpPr>
-          <p:cNvPr id="966242407" name="AutoShape 15"/>
+          <p:cNvPr id="865535691" name="AutoShape 15"/>
           <p:cNvSpPr/>
           <p:nvPr/>
         </p:nvSpPr>
@@ -15392,7 +15392,7 @@
       </p:sp>
       <p:sp>
         <p:nvSpPr>
-          <p:cNvPr id="976848239" name="AutoShape 16"/>
+          <p:cNvPr id="245481751" name="AutoShape 16"/>
           <p:cNvSpPr/>
           <p:nvPr/>
         </p:nvSpPr>
@@ -15434,7 +15434,7 @@
       </p:sp>
       <p:pic>
         <p:nvPicPr>
-          <p:cNvPr id="550395688" name="Picture 17"/>
+          <p:cNvPr id="151118999" name="Picture 17"/>
           <p:cNvPicPr>
             <a:picLocks noChangeAspect="1"/>
           </p:cNvPicPr>
@@ -15462,7 +15462,7 @@
       </p:pic>
       <p:sp>
         <p:nvSpPr>
-          <p:cNvPr id="1994917544" name="AutoShape 18"/>
+          <p:cNvPr id="378804565" name="AutoShape 18"/>
           <p:cNvSpPr/>
           <p:nvPr/>
         </p:nvSpPr>
@@ -15530,7 +15530,7 @@
       </p:sp>
       <p:sp>
         <p:nvSpPr>
-          <p:cNvPr id="1694379061" name="AutoShape 19"/>
+          <p:cNvPr id="578143736" name="AutoShape 19"/>
           <p:cNvSpPr/>
           <p:nvPr/>
         </p:nvSpPr>
@@ -15572,7 +15572,7 @@
       </p:sp>
       <p:pic>
         <p:nvPicPr>
-          <p:cNvPr id="1641441413" name="Picture 20"/>
+          <p:cNvPr id="235659088" name="Picture 20"/>
           <p:cNvPicPr>
             <a:picLocks noChangeAspect="1"/>
           </p:cNvPicPr>
@@ -15600,7 +15600,7 @@
       </p:pic>
       <p:sp>
         <p:nvSpPr>
-          <p:cNvPr id="714337797" name="AutoShape 21"/>
+          <p:cNvPr id="686404168" name="AutoShape 21"/>
           <p:cNvSpPr/>
           <p:nvPr/>
         </p:nvSpPr>
@@ -15668,7 +15668,7 @@
       </p:sp>
       <p:sp>
         <p:nvSpPr>
-          <p:cNvPr id="1193455599" name="AutoShape 22"/>
+          <p:cNvPr id="899576237" name="AutoShape 22"/>
           <p:cNvSpPr/>
           <p:nvPr/>
         </p:nvSpPr>
@@ -15710,7 +15710,7 @@
       </p:sp>
       <p:pic>
         <p:nvPicPr>
-          <p:cNvPr id="837226144" name="Picture 23"/>
+          <p:cNvPr id="637719595" name="Picture 23"/>
           <p:cNvPicPr>
             <a:picLocks noChangeAspect="1"/>
           </p:cNvPicPr>
@@ -15738,7 +15738,7 @@
       </p:pic>
       <p:sp>
         <p:nvSpPr>
-          <p:cNvPr id="819458209" name="AutoShape 24"/>
+          <p:cNvPr id="284577544" name="AutoShape 24"/>
           <p:cNvSpPr/>
           <p:nvPr/>
         </p:nvSpPr>
@@ -15858,7 +15858,7 @@
       </p:grpSpPr>
       <p:sp>
         <p:nvSpPr>
-          <p:cNvPr id="1584838606" name="AutoShape 2"/>
+          <p:cNvPr id="126225477" name="AutoShape 2"/>
           <p:cNvSpPr/>
           <p:nvPr/>
         </p:nvSpPr>
@@ -15904,12 +15904,12 @@
       </p:sp>
       <p:cxnSp>
         <p:nvCxnSpPr>
-          <p:cNvPr id="519137444" name="Connector 3"/>
+          <p:cNvPr id="2019246491" name="Connector 3"/>
           <p:cNvCxnSpPr/>
           <p:nvPr/>
         </p:nvCxnSpPr>
         <p:spPr bwMode="auto">
-          <a:xfrm rot="-42967" flipH="0" flipV="0">
+          <a:xfrm rot="-42966" flipH="0" flipV="0">
             <a:off x="762040" y="1771650"/>
             <a:ext cx="1016000" cy="12700"/>
           </a:xfrm>
@@ -15936,7 +15936,7 @@
       </p:cxnSp>
       <p:sp>
         <p:nvSpPr>
-          <p:cNvPr id="1387800416" name="AutoShape 4"/>
+          <p:cNvPr id="173031433" name="AutoShape 4"/>
           <p:cNvSpPr/>
           <p:nvPr/>
         </p:nvSpPr>
@@ -15978,7 +15978,7 @@
       </p:sp>
       <p:pic>
         <p:nvPicPr>
-          <p:cNvPr id="252491279" name="Picture 5"/>
+          <p:cNvPr id="513805777" name="Picture 5"/>
           <p:cNvPicPr>
             <a:picLocks noChangeAspect="1"/>
           </p:cNvPicPr>
@@ -16006,7 +16006,7 @@
       </p:pic>
       <p:sp>
         <p:nvSpPr>
-          <p:cNvPr id="1068284145" name="AutoShape 6"/>
+          <p:cNvPr id="1109790306" name="AutoShape 6"/>
           <p:cNvSpPr/>
           <p:nvPr/>
         </p:nvSpPr>
@@ -16074,7 +16074,7 @@
       </p:sp>
       <p:sp>
         <p:nvSpPr>
-          <p:cNvPr id="320547999" name="AutoShape 7"/>
+          <p:cNvPr id="1028045343" name="AutoShape 7"/>
           <p:cNvSpPr/>
           <p:nvPr/>
         </p:nvSpPr>
@@ -16116,7 +16116,7 @@
       </p:sp>
       <p:pic>
         <p:nvPicPr>
-          <p:cNvPr id="1404158987" name="Picture 8"/>
+          <p:cNvPr id="1867687600" name="Picture 8"/>
           <p:cNvPicPr>
             <a:picLocks noChangeAspect="1"/>
           </p:cNvPicPr>
@@ -16144,7 +16144,7 @@
       </p:pic>
       <p:sp>
         <p:nvSpPr>
-          <p:cNvPr id="985804562" name="AutoShape 9"/>
+          <p:cNvPr id="1109727133" name="AutoShape 9"/>
           <p:cNvSpPr/>
           <p:nvPr/>
         </p:nvSpPr>
@@ -16212,7 +16212,7 @@
       </p:sp>
       <p:sp>
         <p:nvSpPr>
-          <p:cNvPr id="1024243234" name="AutoShape 10"/>
+          <p:cNvPr id="1504109546" name="AutoShape 10"/>
           <p:cNvSpPr/>
           <p:nvPr/>
         </p:nvSpPr>
@@ -16254,7 +16254,7 @@
       </p:sp>
       <p:pic>
         <p:nvPicPr>
-          <p:cNvPr id="2073468272" name="Picture 11"/>
+          <p:cNvPr id="1952251494" name="Picture 11"/>
           <p:cNvPicPr>
             <a:picLocks noChangeAspect="1"/>
           </p:cNvPicPr>
@@ -16282,7 +16282,7 @@
       </p:pic>
       <p:sp>
         <p:nvSpPr>
-          <p:cNvPr id="2138060390" name="AutoShape 12"/>
+          <p:cNvPr id="1455530797" name="AutoShape 12"/>
           <p:cNvSpPr/>
           <p:nvPr/>
         </p:nvSpPr>
@@ -16350,7 +16350,7 @@
       </p:sp>
       <p:sp>
         <p:nvSpPr>
-          <p:cNvPr id="1354629741" name="AutoShape 13"/>
+          <p:cNvPr id="759622587" name="AutoShape 13"/>
           <p:cNvSpPr/>
           <p:nvPr/>
         </p:nvSpPr>
@@ -16392,7 +16392,7 @@
       </p:sp>
       <p:pic>
         <p:nvPicPr>
-          <p:cNvPr id="1488615213" name="Picture 14"/>
+          <p:cNvPr id="639553364" name="Picture 14"/>
           <p:cNvPicPr>
             <a:picLocks noChangeAspect="1"/>
           </p:cNvPicPr>
@@ -16420,7 +16420,7 @@
       </p:pic>
       <p:sp>
         <p:nvSpPr>
-          <p:cNvPr id="1513811469" name="AutoShape 15"/>
+          <p:cNvPr id="1554920336" name="AutoShape 15"/>
           <p:cNvSpPr/>
           <p:nvPr/>
         </p:nvSpPr>
@@ -16466,7 +16466,7 @@
       </p:sp>
       <p:cxnSp>
         <p:nvCxnSpPr>
-          <p:cNvPr id="1128025936" name="Connector 16"/>
+          <p:cNvPr id="1527746606" name="Connector 16"/>
           <p:cNvCxnSpPr/>
           <p:nvPr/>
         </p:nvCxnSpPr>
@@ -16498,7 +16498,7 @@
       </p:cxnSp>
       <p:cxnSp>
         <p:nvCxnSpPr>
-          <p:cNvPr id="1525309004" name="Connector 17"/>
+          <p:cNvPr id="1037823077" name="Connector 17"/>
           <p:cNvCxnSpPr/>
           <p:nvPr/>
         </p:nvCxnSpPr>
@@ -16530,7 +16530,7 @@
       </p:cxnSp>
       <p:cxnSp>
         <p:nvCxnSpPr>
-          <p:cNvPr id="1440105297" name="Connector 18"/>
+          <p:cNvPr id="1612455211" name="Connector 18"/>
           <p:cNvCxnSpPr/>
           <p:nvPr/>
         </p:nvCxnSpPr>
@@ -16562,7 +16562,7 @@
       </p:cxnSp>
       <p:sp>
         <p:nvSpPr>
-          <p:cNvPr id="1915082069" name="AutoShape 19"/>
+          <p:cNvPr id="542882613" name="AutoShape 19"/>
           <p:cNvSpPr/>
           <p:nvPr/>
         </p:nvSpPr>
@@ -16598,7 +16598,7 @@
       </p:sp>
       <p:sp>
         <p:nvSpPr>
-          <p:cNvPr id="922523531" name="AutoShape 20"/>
+          <p:cNvPr id="710518756" name="AutoShape 20"/>
           <p:cNvSpPr/>
           <p:nvPr/>
         </p:nvSpPr>
@@ -16634,7 +16634,7 @@
       </p:sp>
       <p:sp>
         <p:nvSpPr>
-          <p:cNvPr id="2067536160" name="AutoShape 21"/>
+          <p:cNvPr id="2109663476" name="AutoShape 21"/>
           <p:cNvSpPr/>
           <p:nvPr/>
         </p:nvSpPr>
@@ -16670,7 +16670,7 @@
       </p:sp>
       <p:sp>
         <p:nvSpPr>
-          <p:cNvPr id="1782229377" name="AutoShape 22"/>
+          <p:cNvPr id="1516227612" name="AutoShape 22"/>
           <p:cNvSpPr/>
           <p:nvPr/>
         </p:nvSpPr>
@@ -16770,7 +16770,7 @@
       </p:grpSpPr>
       <p:sp>
         <p:nvSpPr>
-          <p:cNvPr id="1038104553" name="AutoShape 2"/>
+          <p:cNvPr id="1231329684" name="AutoShape 2"/>
           <p:cNvSpPr/>
           <p:nvPr/>
         </p:nvSpPr>
@@ -16816,7 +16816,7 @@
       </p:sp>
       <p:sp>
         <p:nvSpPr>
-          <p:cNvPr id="1940450696" name="AutoShape 3"/>
+          <p:cNvPr id="2111479995" name="AutoShape 3"/>
           <p:cNvSpPr/>
           <p:nvPr/>
         </p:nvSpPr>
@@ -16854,7 +16854,7 @@
       </p:sp>
       <p:sp>
         <p:nvSpPr>
-          <p:cNvPr id="760260797" name="AutoShape 4"/>
+          <p:cNvPr id="1664545418" name="AutoShape 4"/>
           <p:cNvSpPr/>
           <p:nvPr/>
         </p:nvSpPr>
@@ -16896,7 +16896,7 @@
       </p:sp>
       <p:pic>
         <p:nvPicPr>
-          <p:cNvPr id="1575092706" name="Picture 5"/>
+          <p:cNvPr id="761267046" name="Picture 5"/>
           <p:cNvPicPr>
             <a:picLocks noChangeAspect="1"/>
           </p:cNvPicPr>
@@ -16918,7 +16918,7 @@
       </p:pic>
       <p:sp>
         <p:nvSpPr>
-          <p:cNvPr id="1638826212" name="AutoShape 6"/>
+          <p:cNvPr id="880586628" name="AutoShape 6"/>
           <p:cNvSpPr/>
           <p:nvPr/>
         </p:nvSpPr>
@@ -16964,7 +16964,7 @@
       </p:sp>
       <p:cxnSp>
         <p:nvCxnSpPr>
-          <p:cNvPr id="1748884197" name="Connector 7"/>
+          <p:cNvPr id="1743273504" name="Connector 7"/>
           <p:cNvCxnSpPr/>
           <p:nvPr/>
         </p:nvCxnSpPr>
@@ -16996,7 +16996,7 @@
       </p:cxnSp>
       <p:sp>
         <p:nvSpPr>
-          <p:cNvPr id="245490067" name="AutoShape 8"/>
+          <p:cNvPr id="791339586" name="AutoShape 8"/>
           <p:cNvSpPr/>
           <p:nvPr/>
         </p:nvSpPr>
@@ -17044,7 +17044,7 @@
       </p:sp>
       <p:sp>
         <p:nvSpPr>
-          <p:cNvPr id="1855606421" name="AutoShape 9"/>
+          <p:cNvPr id="464703986" name="AutoShape 9"/>
           <p:cNvSpPr/>
           <p:nvPr/>
         </p:nvSpPr>
@@ -17086,7 +17086,7 @@
       </p:sp>
       <p:pic>
         <p:nvPicPr>
-          <p:cNvPr id="241579892" name="Picture 10"/>
+          <p:cNvPr id="1276029106" name="Picture 10"/>
           <p:cNvPicPr>
             <a:picLocks noChangeAspect="1"/>
           </p:cNvPicPr>
@@ -17114,7 +17114,7 @@
       </p:pic>
       <p:sp>
         <p:nvSpPr>
-          <p:cNvPr id="2109372061" name="AutoShape 11"/>
+          <p:cNvPr id="1871427145" name="AutoShape 11"/>
           <p:cNvSpPr/>
           <p:nvPr/>
         </p:nvSpPr>
@@ -17160,7 +17160,7 @@
       </p:sp>
       <p:cxnSp>
         <p:nvCxnSpPr>
-          <p:cNvPr id="312073033" name="Connector 12"/>
+          <p:cNvPr id="2094127720" name="Connector 12"/>
           <p:cNvCxnSpPr/>
           <p:nvPr/>
         </p:nvCxnSpPr>
@@ -17192,7 +17192,7 @@
       </p:cxnSp>
       <p:sp>
         <p:nvSpPr>
-          <p:cNvPr id="1621168146" name="AutoShape 13"/>
+          <p:cNvPr id="1172091766" name="AutoShape 13"/>
           <p:cNvSpPr/>
           <p:nvPr/>
         </p:nvSpPr>
@@ -17240,7 +17240,7 @@
       </p:sp>
       <p:sp>
         <p:nvSpPr>
-          <p:cNvPr id="360093794" name="AutoShape 14"/>
+          <p:cNvPr id="1643790445" name="AutoShape 14"/>
           <p:cNvSpPr/>
           <p:nvPr/>
         </p:nvSpPr>
@@ -17282,7 +17282,7 @@
       </p:sp>
       <p:pic>
         <p:nvPicPr>
-          <p:cNvPr id="1291730363" name="Picture 15"/>
+          <p:cNvPr id="347751116" name="Picture 15"/>
           <p:cNvPicPr>
             <a:picLocks noChangeAspect="1"/>
           </p:cNvPicPr>
@@ -17310,7 +17310,7 @@
       </p:pic>
       <p:sp>
         <p:nvSpPr>
-          <p:cNvPr id="139228441" name="AutoShape 16"/>
+          <p:cNvPr id="1362530880" name="AutoShape 16"/>
           <p:cNvSpPr/>
           <p:nvPr/>
         </p:nvSpPr>
@@ -17356,7 +17356,7 @@
       </p:sp>
       <p:cxnSp>
         <p:nvCxnSpPr>
-          <p:cNvPr id="1689168790" name="Connector 17"/>
+          <p:cNvPr id="1593256202" name="Connector 17"/>
           <p:cNvCxnSpPr/>
           <p:nvPr/>
         </p:nvCxnSpPr>
@@ -17388,7 +17388,7 @@
       </p:cxnSp>
       <p:sp>
         <p:nvSpPr>
-          <p:cNvPr id="362455571" name="AutoShape 18"/>
+          <p:cNvPr id="1918700872" name="AutoShape 18"/>
           <p:cNvSpPr/>
           <p:nvPr/>
         </p:nvSpPr>
@@ -17510,7 +17510,7 @@
       </p:grpSpPr>
       <p:sp>
         <p:nvSpPr>
-          <p:cNvPr id="1539448298" name="AutoShape 2"/>
+          <p:cNvPr id="1956304423" name="AutoShape 2"/>
           <p:cNvSpPr/>
           <p:nvPr/>
         </p:nvSpPr>
@@ -17556,7 +17556,7 @@
       </p:sp>
       <p:sp>
         <p:nvSpPr>
-          <p:cNvPr id="1416041839" name="AutoShape 3"/>
+          <p:cNvPr id="163774600" name="AutoShape 3"/>
           <p:cNvSpPr/>
           <p:nvPr/>
         </p:nvSpPr>
@@ -17598,7 +17598,7 @@
       </p:sp>
       <p:sp>
         <p:nvSpPr>
-          <p:cNvPr id="391079155" name="AutoShape 4"/>
+          <p:cNvPr id="1710416192" name="AutoShape 4"/>
           <p:cNvSpPr/>
           <p:nvPr/>
         </p:nvSpPr>
@@ -17644,7 +17644,7 @@
       </p:sp>
       <p:cxnSp>
         <p:nvCxnSpPr>
-          <p:cNvPr id="283443759" name="Connector 5"/>
+          <p:cNvPr id="1726844887" name="Connector 5"/>
           <p:cNvCxnSpPr/>
           <p:nvPr/>
         </p:nvCxnSpPr>
@@ -17676,7 +17676,7 @@
       </p:cxnSp>
       <p:pic>
         <p:nvPicPr>
-          <p:cNvPr id="747808477" name="Picture 6"/>
+          <p:cNvPr id="1729392380" name="Picture 6"/>
           <p:cNvPicPr>
             <a:picLocks noChangeAspect="1"/>
           </p:cNvPicPr>
@@ -17704,7 +17704,7 @@
       </p:pic>
       <p:sp>
         <p:nvSpPr>
-          <p:cNvPr id="1621012647" name="AutoShape 7"/>
+          <p:cNvPr id="841273956" name="AutoShape 7"/>
           <p:cNvSpPr/>
           <p:nvPr/>
         </p:nvSpPr>
@@ -17772,7 +17772,7 @@
       </p:sp>
       <p:pic>
         <p:nvPicPr>
-          <p:cNvPr id="494824963" name="Picture 8"/>
+          <p:cNvPr id="1862353807" name="Picture 8"/>
           <p:cNvPicPr>
             <a:picLocks noChangeAspect="1"/>
           </p:cNvPicPr>
@@ -17800,7 +17800,7 @@
       </p:pic>
       <p:sp>
         <p:nvSpPr>
-          <p:cNvPr id="642757069" name="AutoShape 9"/>
+          <p:cNvPr id="615485544" name="AutoShape 9"/>
           <p:cNvSpPr/>
           <p:nvPr/>
         </p:nvSpPr>
@@ -17868,7 +17868,7 @@
       </p:sp>
       <p:pic>
         <p:nvPicPr>
-          <p:cNvPr id="900807118" name="Picture 10"/>
+          <p:cNvPr id="1071803176" name="Picture 10"/>
           <p:cNvPicPr>
             <a:picLocks noChangeAspect="1"/>
           </p:cNvPicPr>
@@ -17896,7 +17896,7 @@
       </p:pic>
       <p:sp>
         <p:nvSpPr>
-          <p:cNvPr id="1638781824" name="AutoShape 11"/>
+          <p:cNvPr id="1041877344" name="AutoShape 11"/>
           <p:cNvSpPr/>
           <p:nvPr/>
         </p:nvSpPr>
@@ -17964,7 +17964,7 @@
       </p:sp>
       <p:sp>
         <p:nvSpPr>
-          <p:cNvPr id="137112267" name="AutoShape 12"/>
+          <p:cNvPr id="1069614164" name="AutoShape 12"/>
           <p:cNvSpPr/>
           <p:nvPr/>
         </p:nvSpPr>
@@ -18006,7 +18006,7 @@
       </p:sp>
       <p:sp>
         <p:nvSpPr>
-          <p:cNvPr id="1446674583" name="AutoShape 13"/>
+          <p:cNvPr id="1947165237" name="AutoShape 13"/>
           <p:cNvSpPr/>
           <p:nvPr/>
         </p:nvSpPr>
@@ -18052,7 +18052,7 @@
       </p:sp>
       <p:cxnSp>
         <p:nvCxnSpPr>
-          <p:cNvPr id="1273222367" name="Connector 14"/>
+          <p:cNvPr id="1475626578" name="Connector 14"/>
           <p:cNvCxnSpPr/>
           <p:nvPr/>
         </p:nvCxnSpPr>
@@ -18084,7 +18084,7 @@
       </p:cxnSp>
       <p:sp>
         <p:nvSpPr>
-          <p:cNvPr id="1997758713" name="AutoShape 15"/>
+          <p:cNvPr id="922772203" name="AutoShape 15"/>
           <p:cNvSpPr/>
           <p:nvPr/>
         </p:nvSpPr>
@@ -18122,7 +18122,7 @@
       </p:sp>
       <p:pic>
         <p:nvPicPr>
-          <p:cNvPr id="380003178" name="Picture 16"/>
+          <p:cNvPr id="1116096206" name="Picture 16"/>
           <p:cNvPicPr>
             <a:picLocks noChangeAspect="1"/>
           </p:cNvPicPr>
@@ -18150,7 +18150,7 @@
       </p:pic>
       <p:sp>
         <p:nvSpPr>
-          <p:cNvPr id="1887185659" name="AutoShape 17"/>
+          <p:cNvPr id="2130078291" name="AutoShape 17"/>
           <p:cNvSpPr/>
           <p:nvPr/>
         </p:nvSpPr>
@@ -18218,7 +18218,7 @@
       </p:sp>
       <p:sp>
         <p:nvSpPr>
-          <p:cNvPr id="1883115379" name="AutoShape 18"/>
+          <p:cNvPr id="1205038093" name="AutoShape 18"/>
           <p:cNvSpPr/>
           <p:nvPr/>
         </p:nvSpPr>
@@ -18256,7 +18256,7 @@
       </p:sp>
       <p:pic>
         <p:nvPicPr>
-          <p:cNvPr id="479597095" name="Picture 19"/>
+          <p:cNvPr id="178551346" name="Picture 19"/>
           <p:cNvPicPr>
             <a:picLocks noChangeAspect="1"/>
           </p:cNvPicPr>
@@ -18284,7 +18284,7 @@
       </p:pic>
       <p:sp>
         <p:nvSpPr>
-          <p:cNvPr id="715868912" name="AutoShape 20"/>
+          <p:cNvPr id="587644401" name="AutoShape 20"/>
           <p:cNvSpPr/>
           <p:nvPr/>
         </p:nvSpPr>
@@ -18352,7 +18352,7 @@
       </p:sp>
       <p:sp>
         <p:nvSpPr>
-          <p:cNvPr id="2005334669" name="AutoShape 21"/>
+          <p:cNvPr id="934163451" name="AutoShape 21"/>
           <p:cNvSpPr/>
           <p:nvPr/>
         </p:nvSpPr>
@@ -18390,7 +18390,7 @@
       </p:sp>
       <p:pic>
         <p:nvPicPr>
-          <p:cNvPr id="437039106" name="Picture 22"/>
+          <p:cNvPr id="1575379085" name="Picture 22"/>
           <p:cNvPicPr>
             <a:picLocks noChangeAspect="1"/>
           </p:cNvPicPr>
@@ -18418,7 +18418,7 @@
       </p:pic>
       <p:sp>
         <p:nvSpPr>
-          <p:cNvPr id="547529333" name="AutoShape 23"/>
+          <p:cNvPr id="458884071" name="AutoShape 23"/>
           <p:cNvSpPr/>
           <p:nvPr/>
         </p:nvSpPr>
@@ -18486,7 +18486,7 @@
       </p:sp>
       <p:sp>
         <p:nvSpPr>
-          <p:cNvPr id="615710495" name="AutoShape 24"/>
+          <p:cNvPr id="265849449" name="AutoShape 24"/>
           <p:cNvSpPr/>
           <p:nvPr/>
         </p:nvSpPr>
@@ -18524,7 +18524,7 @@
       </p:sp>
       <p:pic>
         <p:nvPicPr>
-          <p:cNvPr id="767991469" name="Picture 25"/>
+          <p:cNvPr id="1800519340" name="Picture 25"/>
           <p:cNvPicPr>
             <a:picLocks noChangeAspect="1"/>
           </p:cNvPicPr>
@@ -18552,7 +18552,7 @@
       </p:pic>
       <p:sp>
         <p:nvSpPr>
-          <p:cNvPr id="1015460060" name="AutoShape 26"/>
+          <p:cNvPr id="1577223274" name="AutoShape 26"/>
           <p:cNvSpPr/>
           <p:nvPr/>
         </p:nvSpPr>
@@ -18672,7 +18672,7 @@
       </p:grpSpPr>
       <p:sp>
         <p:nvSpPr>
-          <p:cNvPr id="1645162001" name="AutoShape 2"/>
+          <p:cNvPr id="402900574" name="AutoShape 2"/>
           <p:cNvSpPr/>
           <p:nvPr/>
         </p:nvSpPr>
@@ -18718,12 +18718,12 @@
       </p:sp>
       <p:cxnSp>
         <p:nvCxnSpPr>
-          <p:cNvPr id="87069386" name="Connector 3"/>
+          <p:cNvPr id="264556660" name="Connector 3"/>
           <p:cNvCxnSpPr/>
           <p:nvPr/>
         </p:nvCxnSpPr>
         <p:spPr bwMode="auto">
-          <a:xfrm rot="-42967" flipH="0" flipV="0">
+          <a:xfrm rot="-42966" flipH="0" flipV="0">
             <a:off x="762040" y="1771650"/>
             <a:ext cx="1016000" cy="12700"/>
           </a:xfrm>
@@ -18750,7 +18750,7 @@
       </p:cxnSp>
       <p:sp>
         <p:nvSpPr>
-          <p:cNvPr id="1031244404" name="AutoShape 4"/>
+          <p:cNvPr id="1970586784" name="AutoShape 4"/>
           <p:cNvSpPr/>
           <p:nvPr/>
         </p:nvSpPr>
@@ -18792,7 +18792,7 @@
       </p:sp>
       <p:pic>
         <p:nvPicPr>
-          <p:cNvPr id="23169820" name="Picture 5"/>
+          <p:cNvPr id="737048851" name="Picture 5"/>
           <p:cNvPicPr>
             <a:picLocks noChangeAspect="1"/>
           </p:cNvPicPr>
@@ -18820,7 +18820,7 @@
       </p:pic>
       <p:sp>
         <p:nvSpPr>
-          <p:cNvPr id="1962675982" name="AutoShape 6"/>
+          <p:cNvPr id="1800648034" name="AutoShape 6"/>
           <p:cNvSpPr/>
           <p:nvPr/>
         </p:nvSpPr>
@@ -18866,7 +18866,7 @@
       </p:sp>
       <p:sp>
         <p:nvSpPr>
-          <p:cNvPr id="598258734" name="AutoShape 7"/>
+          <p:cNvPr id="1446963429" name="AutoShape 7"/>
           <p:cNvSpPr/>
           <p:nvPr/>
         </p:nvSpPr>
@@ -18970,7 +18970,7 @@
       </p:sp>
       <p:sp>
         <p:nvSpPr>
-          <p:cNvPr id="425419107" name="AutoShape 8"/>
+          <p:cNvPr id="1392826490" name="AutoShape 8"/>
           <p:cNvSpPr/>
           <p:nvPr/>
         </p:nvSpPr>
@@ -19012,7 +19012,7 @@
       </p:sp>
       <p:pic>
         <p:nvPicPr>
-          <p:cNvPr id="1378045953" name="Picture 9"/>
+          <p:cNvPr id="2061112021" name="Picture 9"/>
           <p:cNvPicPr>
             <a:picLocks noChangeAspect="1"/>
           </p:cNvPicPr>
@@ -19040,7 +19040,7 @@
       </p:pic>
       <p:sp>
         <p:nvSpPr>
-          <p:cNvPr id="2053788506" name="AutoShape 10"/>
+          <p:cNvPr id="2059755598" name="AutoShape 10"/>
           <p:cNvSpPr/>
           <p:nvPr/>
         </p:nvSpPr>
@@ -19086,7 +19086,7 @@
       </p:sp>
       <p:sp>
         <p:nvSpPr>
-          <p:cNvPr id="1567491729" name="AutoShape 11"/>
+          <p:cNvPr id="1093908337" name="AutoShape 11"/>
           <p:cNvSpPr/>
           <p:nvPr/>
         </p:nvSpPr>
@@ -19190,7 +19190,7 @@
       </p:sp>
       <p:sp>
         <p:nvSpPr>
-          <p:cNvPr id="1204878881" name="AutoShape 12"/>
+          <p:cNvPr id="1756853195" name="AutoShape 12"/>
           <p:cNvSpPr/>
           <p:nvPr/>
         </p:nvSpPr>
@@ -19232,7 +19232,7 @@
       </p:sp>
       <p:pic>
         <p:nvPicPr>
-          <p:cNvPr id="713220272" name="Picture 13"/>
+          <p:cNvPr id="2006786679" name="Picture 13"/>
           <p:cNvPicPr>
             <a:picLocks noChangeAspect="1"/>
           </p:cNvPicPr>
@@ -19260,7 +19260,7 @@
       </p:pic>
       <p:sp>
         <p:nvSpPr>
-          <p:cNvPr id="2098025954" name="AutoShape 14"/>
+          <p:cNvPr id="188897271" name="AutoShape 14"/>
           <p:cNvSpPr/>
           <p:nvPr/>
         </p:nvSpPr>
@@ -19306,7 +19306,7 @@
       </p:sp>
       <p:sp>
         <p:nvSpPr>
-          <p:cNvPr id="1252482345" name="AutoShape 15"/>
+          <p:cNvPr id="1724082318" name="AutoShape 15"/>
           <p:cNvSpPr/>
           <p:nvPr/>
         </p:nvSpPr>
@@ -19410,7 +19410,7 @@
       </p:sp>
       <p:sp>
         <p:nvSpPr>
-          <p:cNvPr id="519270742" name="AutoShape 16"/>
+          <p:cNvPr id="1553141602" name="AutoShape 16"/>
           <p:cNvSpPr/>
           <p:nvPr/>
         </p:nvSpPr>
@@ -19452,7 +19452,7 @@
       </p:sp>
       <p:pic>
         <p:nvPicPr>
-          <p:cNvPr id="2017295514" name="Picture 17"/>
+          <p:cNvPr id="706987180" name="Picture 17"/>
           <p:cNvPicPr>
             <a:picLocks noChangeAspect="1"/>
           </p:cNvPicPr>
@@ -19480,7 +19480,7 @@
       </p:pic>
       <p:sp>
         <p:nvSpPr>
-          <p:cNvPr id="353671697" name="AutoShape 18"/>
+          <p:cNvPr id="1726601307" name="AutoShape 18"/>
           <p:cNvSpPr/>
           <p:nvPr/>
         </p:nvSpPr>
@@ -19526,7 +19526,7 @@
       </p:sp>
       <p:sp>
         <p:nvSpPr>
-          <p:cNvPr id="1018892335" name="AutoShape 19"/>
+          <p:cNvPr id="1460537777" name="AutoShape 19"/>
           <p:cNvSpPr/>
           <p:nvPr/>
         </p:nvSpPr>
@@ -19682,7 +19682,7 @@
       </p:grpSpPr>
       <p:sp>
         <p:nvSpPr>
-          <p:cNvPr id="620603121" name="AutoShape 2"/>
+          <p:cNvPr id="226821661" name="AutoShape 2"/>
           <p:cNvSpPr/>
           <p:nvPr/>
         </p:nvSpPr>
@@ -19728,7 +19728,7 @@
       </p:sp>
       <p:sp>
         <p:nvSpPr>
-          <p:cNvPr id="1900452070" name="AutoShape 3"/>
+          <p:cNvPr id="226146675" name="AutoShape 3"/>
           <p:cNvSpPr/>
           <p:nvPr/>
         </p:nvSpPr>
@@ -19770,7 +19770,7 @@
       </p:sp>
       <p:pic>
         <p:nvPicPr>
-          <p:cNvPr id="2137618961" name="Picture 4"/>
+          <p:cNvPr id="21699405" name="Picture 4"/>
           <p:cNvPicPr>
             <a:picLocks noChangeAspect="1"/>
           </p:cNvPicPr>
@@ -19798,7 +19798,7 @@
       </p:pic>
       <p:sp>
         <p:nvSpPr>
-          <p:cNvPr id="1353629866" name="AutoShape 5"/>
+          <p:cNvPr id="1754152209" name="AutoShape 5"/>
           <p:cNvSpPr/>
           <p:nvPr/>
         </p:nvSpPr>
@@ -19844,7 +19844,7 @@
       </p:sp>
       <p:cxnSp>
         <p:nvCxnSpPr>
-          <p:cNvPr id="569472022" name="Connector 6"/>
+          <p:cNvPr id="1556180544" name="Connector 6"/>
           <p:cNvCxnSpPr/>
           <p:nvPr/>
         </p:nvCxnSpPr>
@@ -19876,7 +19876,7 @@
       </p:cxnSp>
       <p:sp>
         <p:nvSpPr>
-          <p:cNvPr id="168597731" name="AutoShape 7"/>
+          <p:cNvPr id="178283041" name="AutoShape 7"/>
           <p:cNvSpPr/>
           <p:nvPr/>
         </p:nvSpPr>
@@ -19998,7 +19998,7 @@
       </p:sp>
       <p:sp>
         <p:nvSpPr>
-          <p:cNvPr id="1395440977" name="AutoShape 8"/>
+          <p:cNvPr id="1446884120" name="AutoShape 8"/>
           <p:cNvSpPr/>
           <p:nvPr/>
         </p:nvSpPr>
@@ -20040,7 +20040,7 @@
       </p:sp>
       <p:pic>
         <p:nvPicPr>
-          <p:cNvPr id="1096191651" name="Picture 9"/>
+          <p:cNvPr id="574813167" name="Picture 9"/>
           <p:cNvPicPr>
             <a:picLocks noChangeAspect="1"/>
           </p:cNvPicPr>
@@ -20068,7 +20068,7 @@
       </p:pic>
       <p:sp>
         <p:nvSpPr>
-          <p:cNvPr id="1508053002" name="AutoShape 10"/>
+          <p:cNvPr id="1998267056" name="AutoShape 10"/>
           <p:cNvSpPr/>
           <p:nvPr/>
         </p:nvSpPr>
@@ -20114,7 +20114,7 @@
       </p:sp>
       <p:cxnSp>
         <p:nvCxnSpPr>
-          <p:cNvPr id="1093961738" name="Connector 11"/>
+          <p:cNvPr id="1798757257" name="Connector 11"/>
           <p:cNvCxnSpPr/>
           <p:nvPr/>
         </p:nvCxnSpPr>
@@ -20146,7 +20146,7 @@
       </p:cxnSp>
       <p:sp>
         <p:nvSpPr>
-          <p:cNvPr id="459873495" name="AutoShape 12"/>
+          <p:cNvPr id="1088072052" name="AutoShape 12"/>
           <p:cNvSpPr/>
           <p:nvPr/>
         </p:nvSpPr>
@@ -20268,7 +20268,7 @@
       </p:sp>
       <p:sp>
         <p:nvSpPr>
-          <p:cNvPr id="1106788160" name="AutoShape 13"/>
+          <p:cNvPr id="619479541" name="AutoShape 13"/>
           <p:cNvSpPr/>
           <p:nvPr/>
         </p:nvSpPr>
@@ -20310,7 +20310,7 @@
       </p:sp>
       <p:pic>
         <p:nvPicPr>
-          <p:cNvPr id="1651180736" name="Picture 14"/>
+          <p:cNvPr id="388298602" name="Picture 14"/>
           <p:cNvPicPr>
             <a:picLocks noChangeAspect="1"/>
           </p:cNvPicPr>
@@ -20332,7 +20332,7 @@
       </p:pic>
       <p:sp>
         <p:nvSpPr>
-          <p:cNvPr id="288994587" name="AutoShape 15"/>
+          <p:cNvPr id="1391092212" name="AutoShape 15"/>
           <p:cNvSpPr/>
           <p:nvPr/>
         </p:nvSpPr>
@@ -20378,7 +20378,7 @@
       </p:sp>
       <p:cxnSp>
         <p:nvCxnSpPr>
-          <p:cNvPr id="1972222818" name="Connector 16"/>
+          <p:cNvPr id="546517754" name="Connector 16"/>
           <p:cNvCxnSpPr/>
           <p:nvPr/>
         </p:nvCxnSpPr>
@@ -20410,7 +20410,7 @@
       </p:cxnSp>
       <p:sp>
         <p:nvSpPr>
-          <p:cNvPr id="51142480" name="AutoShape 17"/>
+          <p:cNvPr id="676652077" name="AutoShape 17"/>
           <p:cNvSpPr/>
           <p:nvPr/>
         </p:nvSpPr>
@@ -20584,7 +20584,7 @@
       </p:grpSpPr>
       <p:sp>
         <p:nvSpPr>
-          <p:cNvPr id="285058711" name="AutoShape 2"/>
+          <p:cNvPr id="1267364790" name="AutoShape 2"/>
           <p:cNvSpPr/>
           <p:nvPr/>
         </p:nvSpPr>
@@ -20630,7 +20630,7 @@
       </p:sp>
       <p:sp>
         <p:nvSpPr>
-          <p:cNvPr id="638470229" name="AutoShape 3"/>
+          <p:cNvPr id="1758843539" name="AutoShape 3"/>
           <p:cNvSpPr/>
           <p:nvPr/>
         </p:nvSpPr>
@@ -20672,7 +20672,7 @@
       </p:sp>
       <p:sp>
         <p:nvSpPr>
-          <p:cNvPr id="12291160" name="AutoShape 4"/>
+          <p:cNvPr id="1513758097" name="AutoShape 4"/>
           <p:cNvSpPr/>
           <p:nvPr/>
         </p:nvSpPr>
@@ -20718,7 +20718,7 @@
       </p:sp>
       <p:cxnSp>
         <p:nvCxnSpPr>
-          <p:cNvPr id="1251155254" name="Connector 5"/>
+          <p:cNvPr id="1213289870" name="Connector 5"/>
           <p:cNvCxnSpPr/>
           <p:nvPr/>
         </p:nvCxnSpPr>
@@ -20750,7 +20750,7 @@
       </p:cxnSp>
       <p:pic>
         <p:nvPicPr>
-          <p:cNvPr id="482677830" name="Picture 6"/>
+          <p:cNvPr id="613732689" name="Picture 6"/>
           <p:cNvPicPr>
             <a:picLocks noChangeAspect="1"/>
           </p:cNvPicPr>
@@ -20778,7 +20778,7 @@
       </p:pic>
       <p:sp>
         <p:nvSpPr>
-          <p:cNvPr id="1358174039" name="AutoShape 7"/>
+          <p:cNvPr id="1719725663" name="AutoShape 7"/>
           <p:cNvSpPr/>
           <p:nvPr/>
         </p:nvSpPr>
@@ -20824,7 +20824,7 @@
       </p:sp>
       <p:sp>
         <p:nvSpPr>
-          <p:cNvPr id="1672717581" name="AutoShape 8"/>
+          <p:cNvPr id="1821442483" name="AutoShape 8"/>
           <p:cNvSpPr/>
           <p:nvPr/>
         </p:nvSpPr>
@@ -20872,7 +20872,7 @@
       </p:sp>
       <p:pic>
         <p:nvPicPr>
-          <p:cNvPr id="1891689432" name="Picture 9"/>
+          <p:cNvPr id="1145286333" name="Picture 9"/>
           <p:cNvPicPr>
             <a:picLocks noChangeAspect="1"/>
           </p:cNvPicPr>
@@ -20900,7 +20900,7 @@
       </p:pic>
       <p:sp>
         <p:nvSpPr>
-          <p:cNvPr id="217533674" name="AutoShape 10"/>
+          <p:cNvPr id="1616505889" name="AutoShape 10"/>
           <p:cNvSpPr/>
           <p:nvPr/>
         </p:nvSpPr>
@@ -20946,7 +20946,7 @@
       </p:sp>
       <p:sp>
         <p:nvSpPr>
-          <p:cNvPr id="1400273331" name="AutoShape 11"/>
+          <p:cNvPr id="153476544" name="AutoShape 11"/>
           <p:cNvSpPr/>
           <p:nvPr/>
         </p:nvSpPr>
@@ -20994,7 +20994,7 @@
       </p:sp>
       <p:pic>
         <p:nvPicPr>
-          <p:cNvPr id="1949871636" name="Picture 12"/>
+          <p:cNvPr id="263188899" name="Picture 12"/>
           <p:cNvPicPr>
             <a:picLocks noChangeAspect="1"/>
           </p:cNvPicPr>
@@ -21016,7 +21016,7 @@
       </p:pic>
       <p:sp>
         <p:nvSpPr>
-          <p:cNvPr id="1828319155" name="AutoShape 13"/>
+          <p:cNvPr id="1156614972" name="AutoShape 13"/>
           <p:cNvSpPr/>
           <p:nvPr/>
         </p:nvSpPr>
@@ -21062,7 +21062,7 @@
       </p:sp>
       <p:sp>
         <p:nvSpPr>
-          <p:cNvPr id="669479136" name="AutoShape 14"/>
+          <p:cNvPr id="945868482" name="AutoShape 14"/>
           <p:cNvSpPr/>
           <p:nvPr/>
         </p:nvSpPr>
@@ -21110,7 +21110,7 @@
       </p:sp>
       <p:sp>
         <p:nvSpPr>
-          <p:cNvPr id="2044883016" name="AutoShape 15"/>
+          <p:cNvPr id="599105970" name="AutoShape 15"/>
           <p:cNvSpPr/>
           <p:nvPr/>
         </p:nvSpPr>
@@ -21152,7 +21152,7 @@
       </p:sp>
       <p:sp>
         <p:nvSpPr>
-          <p:cNvPr id="608839959" name="AutoShape 16"/>
+          <p:cNvPr id="1800116147" name="AutoShape 16"/>
           <p:cNvSpPr/>
           <p:nvPr/>
         </p:nvSpPr>
@@ -21198,7 +21198,7 @@
       </p:sp>
       <p:cxnSp>
         <p:nvCxnSpPr>
-          <p:cNvPr id="1100113" name="Connector 17"/>
+          <p:cNvPr id="757761714" name="Connector 17"/>
           <p:cNvCxnSpPr/>
           <p:nvPr/>
         </p:nvCxnSpPr>
@@ -21230,7 +21230,7 @@
       </p:cxnSp>
       <p:pic>
         <p:nvPicPr>
-          <p:cNvPr id="645610525" name="Picture 18"/>
+          <p:cNvPr id="1967424523" name="Picture 18"/>
           <p:cNvPicPr>
             <a:picLocks noChangeAspect="1"/>
           </p:cNvPicPr>
@@ -21258,7 +21258,7 @@
       </p:pic>
       <p:sp>
         <p:nvSpPr>
-          <p:cNvPr id="544690671" name="AutoShape 19"/>
+          <p:cNvPr id="1868496892" name="AutoShape 19"/>
           <p:cNvSpPr/>
           <p:nvPr/>
         </p:nvSpPr>
@@ -21304,7 +21304,7 @@
       </p:sp>
       <p:sp>
         <p:nvSpPr>
-          <p:cNvPr id="429025364" name="AutoShape 20"/>
+          <p:cNvPr id="1697948408" name="AutoShape 20"/>
           <p:cNvSpPr/>
           <p:nvPr/>
         </p:nvSpPr>
@@ -21352,7 +21352,7 @@
       </p:sp>
       <p:pic>
         <p:nvPicPr>
-          <p:cNvPr id="447275207" name="Picture 21"/>
+          <p:cNvPr id="1962028818" name="Picture 21"/>
           <p:cNvPicPr>
             <a:picLocks noChangeAspect="1"/>
           </p:cNvPicPr>
@@ -21380,7 +21380,7 @@
       </p:pic>
       <p:sp>
         <p:nvSpPr>
-          <p:cNvPr id="412569832" name="AutoShape 22"/>
+          <p:cNvPr id="1801933316" name="AutoShape 22"/>
           <p:cNvSpPr/>
           <p:nvPr/>
         </p:nvSpPr>
@@ -21426,7 +21426,7 @@
       </p:sp>
       <p:sp>
         <p:nvSpPr>
-          <p:cNvPr id="1473576107" name="AutoShape 23"/>
+          <p:cNvPr id="759527479" name="AutoShape 23"/>
           <p:cNvSpPr/>
           <p:nvPr/>
         </p:nvSpPr>
@@ -21526,7 +21526,7 @@
       </p:grpSpPr>
       <p:sp>
         <p:nvSpPr>
-          <p:cNvPr id="566434030" name="AutoShape 2"/>
+          <p:cNvPr id="1025303068" name="AutoShape 2"/>
           <p:cNvSpPr/>
           <p:nvPr/>
         </p:nvSpPr>
@@ -21572,12 +21572,12 @@
       </p:sp>
       <p:cxnSp>
         <p:nvCxnSpPr>
-          <p:cNvPr id="1956057934" name="Connector 3"/>
+          <p:cNvPr id="471150498" name="Connector 3"/>
           <p:cNvCxnSpPr/>
           <p:nvPr/>
         </p:nvCxnSpPr>
         <p:spPr bwMode="auto">
-          <a:xfrm rot="-42967" flipH="0" flipV="0">
+          <a:xfrm rot="-42966" flipH="0" flipV="0">
             <a:off x="762040" y="1771650"/>
             <a:ext cx="1016000" cy="12700"/>
           </a:xfrm>
@@ -21604,7 +21604,7 @@
       </p:cxnSp>
       <p:sp>
         <p:nvSpPr>
-          <p:cNvPr id="1140347772" name="AutoShape 4"/>
+          <p:cNvPr id="521635998" name="AutoShape 4"/>
           <p:cNvSpPr/>
           <p:nvPr/>
         </p:nvSpPr>
@@ -21646,7 +21646,7 @@
       </p:sp>
       <p:pic>
         <p:nvPicPr>
-          <p:cNvPr id="1407402513" name="Picture 5"/>
+          <p:cNvPr id="51975987" name="Picture 5"/>
           <p:cNvPicPr>
             <a:picLocks noChangeAspect="1"/>
           </p:cNvPicPr>
@@ -21674,7 +21674,7 @@
       </p:pic>
       <p:sp>
         <p:nvSpPr>
-          <p:cNvPr id="888051605" name="AutoShape 6"/>
+          <p:cNvPr id="258601159" name="AutoShape 6"/>
           <p:cNvSpPr/>
           <p:nvPr/>
         </p:nvSpPr>
@@ -21720,7 +21720,7 @@
       </p:sp>
       <p:sp>
         <p:nvSpPr>
-          <p:cNvPr id="2000368075" name="AutoShape 7"/>
+          <p:cNvPr id="1337308876" name="AutoShape 7"/>
           <p:cNvSpPr/>
           <p:nvPr/>
         </p:nvSpPr>
@@ -21768,7 +21768,7 @@
       </p:sp>
       <p:sp>
         <p:nvSpPr>
-          <p:cNvPr id="1770928845" name="AutoShape 8"/>
+          <p:cNvPr id="1169967678" name="AutoShape 8"/>
           <p:cNvSpPr/>
           <p:nvPr/>
         </p:nvSpPr>
@@ -21810,7 +21810,7 @@
       </p:sp>
       <p:pic>
         <p:nvPicPr>
-          <p:cNvPr id="251460141" name="Picture 9"/>
+          <p:cNvPr id="1177772439" name="Picture 9"/>
           <p:cNvPicPr>
             <a:picLocks noChangeAspect="1"/>
           </p:cNvPicPr>
@@ -21838,7 +21838,7 @@
       </p:pic>
       <p:sp>
         <p:nvSpPr>
-          <p:cNvPr id="90837240" name="AutoShape 10"/>
+          <p:cNvPr id="1412774811" name="AutoShape 10"/>
           <p:cNvSpPr/>
           <p:nvPr/>
         </p:nvSpPr>
@@ -21884,7 +21884,7 @@
       </p:sp>
       <p:sp>
         <p:nvSpPr>
-          <p:cNvPr id="417117292" name="AutoShape 11"/>
+          <p:cNvPr id="1001709013" name="AutoShape 11"/>
           <p:cNvSpPr/>
           <p:nvPr/>
         </p:nvSpPr>
@@ -21932,7 +21932,7 @@
       </p:sp>
       <p:sp>
         <p:nvSpPr>
-          <p:cNvPr id="938037317" name="AutoShape 12"/>
+          <p:cNvPr id="90638384" name="AutoShape 12"/>
           <p:cNvSpPr/>
           <p:nvPr/>
         </p:nvSpPr>
@@ -21974,7 +21974,7 @@
       </p:sp>
       <p:pic>
         <p:nvPicPr>
-          <p:cNvPr id="2069643300" name="Picture 13"/>
+          <p:cNvPr id="907352319" name="Picture 13"/>
           <p:cNvPicPr>
             <a:picLocks noChangeAspect="1"/>
           </p:cNvPicPr>
@@ -22002,7 +22002,7 @@
       </p:pic>
       <p:sp>
         <p:nvSpPr>
-          <p:cNvPr id="838383895" name="AutoShape 14"/>
+          <p:cNvPr id="990367285" name="AutoShape 14"/>
           <p:cNvSpPr/>
           <p:nvPr/>
         </p:nvSpPr>
@@ -22048,7 +22048,7 @@
       </p:sp>
       <p:sp>
         <p:nvSpPr>
-          <p:cNvPr id="493194475" name="AutoShape 15"/>
+          <p:cNvPr id="930404604" name="AutoShape 15"/>
           <p:cNvSpPr/>
           <p:nvPr/>
         </p:nvSpPr>
